--- a/site/showcase/exports/illustration_3.pptx
+++ b/site/showcase/exports/illustration_3.pptx
@@ -22,7 +22,6 @@
     <p:sldId id="270" r:id="rId22"/>
     <p:sldId id="271" r:id="rId23"/>
     <p:sldId id="272" r:id="rId24"/>
-    <p:sldId id="273" r:id="rId25"/>
   </p:sldIdLst>
   <p:sldSz cx="9144000" cy="6858000" type="screen4x3"/>
   <p:notesSz cx="6858000" cy="9144000"/>
@@ -994,17 +993,17 @@
           </a:p>
           <a:p>
             <a:r>
-              <a:t>Claude Vision | synthetic likelihood 5/100; tells: consistent hand-drawn ink linework with natural stroke weight variation, cross-hatched shading at left edge typical of manual/digital-pen editorial cartooning, coherent, correctly spelled hand-lettered text in speech bubble and labels, legible artist signature ('BEELER') with year mark</a:t>
-            </a:r>
-          </a:p>
-          <a:p>
-            <a:r>
-              <a:t>OpenAI Vision | synthetic likelihood 5/100; tells: Consistent pen-and-ink outlines and crosshatched shading throughout the cartoon, Coherent, legible hand-lettered speech and disease labels, Deliberate caricature proportions and integrated symbolic virus heads, Visible publication credit and artist signature</a:t>
-            </a:r>
-          </a:p>
-          <a:p>
-            <a:r>
-              <a:t>Gemini Vision | synthetic likelihood 25/100; tells: consistent editorial cartoon linework, artist signature and syndication text, hand-drawn hatching and crosshatching, coherent hand lettering</a:t>
+              <a:t>Claude Vision | synthetic likelihood 5/100; tells: hand-drawn ink linework with consistent, deliberate pen strokes, coherent, correctly spelled hand-lettered text in speech bubble and labels, legible artist signature and syndication credit (The Columbus Dispatch / CagleCartoons.com, dated '19), cross-hatching texture on left background typical of traditional/digital-inked editorial cartoons</a:t>
+            </a:r>
+          </a:p>
+          <a:p>
+            <a:r>
+              <a:t>OpenAI Vision | synthetic likelihood 8/100; tells: Consistent editorial-cartoon ink outlines and crosshatching, Coherent hand-lettered speech and disease labels, Deliberate, consistent caricature proportions, Integrated publication credit and artist signature</a:t>
+            </a:r>
+          </a:p>
+          <a:p>
+            <a:r>
+              <a:t>Gemini Vision | synthetic likelihood 25/100; tells: consistent hand-drawn editorial cartoon style, legible artist signature and syndicate attribution, coherent crosshatching and ink work, absence of diffusion generation artifacts</a:t>
             </a:r>
           </a:p>
         </p:txBody>
@@ -1169,7 +1168,7 @@
           </a:p>
           <a:p>
             <a:r>
-              <a:t>Recorded text | I REJECT VACCINES OUT OF LOVE FOR MY CHILDREN. | VAX | MEASLES | MUMPS | RUBELLA | THE COLUMBUS DISPATCH CAGLECARTOONS.com | BEELER ©19</a:t>
+              <a:t>Recorded text | THE COLUMBUS DISPATCH CAGLECARTOONS.COM Beeler 2019 / I REJECT VACCINES OUT OF LOVE FOR MY CHILDREN. / NO VAX / MEASLES / MUMPS / RUBELLA</a:t>
             </a:r>
           </a:p>
         </p:txBody>
@@ -1344,12 +1343,12 @@
           </a:p>
           <a:p>
             <a:r>
-              <a:t>Analysis ID | e716b5d1-879a-47a3-8409-9343f8dc749d</a:t>
-            </a:r>
-          </a:p>
-          <a:p>
-            <a:r>
-              <a:t>Generated | 2026-09-26T18:37:51+00:00</a:t>
+              <a:t>Analysis ID | b5d4ff88-8488-45f9-af47-300bcc02ff34</a:t>
+            </a:r>
+          </a:p>
+          <a:p>
+            <a:r>
+              <a:t>Generated | 2026-09-26T22:31:04+00:00</a:t>
             </a:r>
           </a:p>
           <a:p>
@@ -1364,7 +1363,7 @@
           </a:p>
           <a:p>
             <a:r>
-              <a:t>Method version | verdict-consistency-2026-09-26.1</a:t>
+              <a:t>Method version | pdf-preparation-2026-09-26.1</a:t>
             </a:r>
           </a:p>
           <a:p>
@@ -1379,137 +1378,12 @@
           </a:p>
           <a:p>
             <a:r>
-              <a:t>Ingestion note 1 | Recomputed locally from saved LLM replies acquired at 2026-09-25T11:22:07+00:00 under method publication-repair-2026-09-24.3. Original report ae05de4f-1d78-4c71-85a5-9a9e833d7306 is preserved. No new provider requests. The original analysis used a source-labelled filename; this is not a source-blind comparison.</a:t>
-            </a:r>
-          </a:p>
-          <a:p>
-            <a:r>
-              <a:t>Ingestion note 2 | Presentation copy of saved report a7209748-4dcd-4092-898a-e2a5dc6c475f. The descriptive filename replaces the earlier example ID for navigation. Original analysis dates, provider replies, scores and acquisition context are retained; no new model analysis.</a:t>
-            </a:r>
-          </a:p>
-        </p:txBody>
-      </p:sp>
-      <p:sp>
-        <p:nvSpPr>
-          <p:cNvPr id="4" name="Slide Number Placeholder 3"/>
-          <p:cNvSpPr>
-            <a:spLocks noGrp="1"/>
-          </p:cNvSpPr>
-          <p:nvPr>
-            <p:ph type="sldNum" idx="5" sz="quarter"/>
-          </p:nvPr>
-        </p:nvSpPr>
-        <p:spPr/>
-      </p:sp>
-    </p:spTree>
-  </p:cSld>
-  <p:clrMapOvr>
-    <a:masterClrMapping/>
-  </p:clrMapOvr>
-</p:notes>
-</file>
-
-<file path=ppt/notesSlides/notesSlide18.xml><?xml version="1.0" encoding="utf-8"?>
-<p:notes xmlns:a="http://schemas.openxmlformats.org/drawingml/2006/main" xmlns:p="http://schemas.openxmlformats.org/presentationml/2006/main" xmlns:r="http://schemas.openxmlformats.org/officeDocument/2006/relationships">
-  <p:cSld>
-    <p:spTree>
-      <p:nvGrpSpPr>
-        <p:cNvPr id="1" name=""/>
-        <p:cNvGrpSpPr/>
-        <p:nvPr/>
-      </p:nvGrpSpPr>
-      <p:grpSpPr>
-        <a:xfrm>
-          <a:off x="0" y="0"/>
-          <a:ext cx="0" cy="0"/>
-          <a:chOff x="0" y="0"/>
-          <a:chExt cx="0" cy="0"/>
-        </a:xfrm>
-      </p:grpSpPr>
-      <p:sp>
-        <p:nvSpPr>
-          <p:cNvPr id="2" name="Slide Image Placeholder 1"/>
-          <p:cNvSpPr>
-            <a:spLocks noGrp="1"/>
-          </p:cNvSpPr>
-          <p:nvPr>
-            <p:ph type="sldImg" idx="2"/>
-          </p:nvPr>
-        </p:nvSpPr>
-        <p:spPr/>
-      </p:sp>
-      <p:sp>
-        <p:nvSpPr>
-          <p:cNvPr id="3" name="Notes Placeholder 2"/>
-          <p:cNvSpPr>
-            <a:spLocks noGrp="1"/>
-          </p:cNvSpPr>
-          <p:nvPr>
-            <p:ph type="body" idx="3" sz="quarter"/>
-          </p:nvPr>
-        </p:nvSpPr>
-        <p:spPr/>
-        <p:txBody>
-          <a:bodyPr/>
-          <a:lstStyle/>
-          <a:p>
-            <a:r>
-              <a:t>illustration-3.webp</a:t>
-            </a:r>
-          </a:p>
-          <a:p>
-            <a:r>
-              <a:t>File and analysis record</a:t>
-            </a:r>
-          </a:p>
-          <a:p>
-            <a:r>
-              <a:t>File | illustration-3.webp</a:t>
-            </a:r>
-          </a:p>
-          <a:p>
-            <a:r>
-              <a:t>Analysis ID | e716b5d1-879a-47a3-8409-9343f8dc749d</a:t>
-            </a:r>
-          </a:p>
-          <a:p>
-            <a:r>
-              <a:t>Generated | 2026-09-26T18:37:51+00:00</a:t>
-            </a:r>
-          </a:p>
-          <a:p>
-            <a:r>
-              <a:t>Tool | SDA Vision 0.1.0</a:t>
-            </a:r>
-          </a:p>
-          <a:p>
-            <a:r>
-              <a:t>Models | claude-opus-5-5, gemini-3.8-flash, gpt-6-astra</a:t>
-            </a:r>
-          </a:p>
-          <a:p>
-            <a:r>
-              <a:t>Method version | verdict-consistency-2026-09-26.1</a:t>
-            </a:r>
-          </a:p>
-          <a:p>
-            <a:r>
-              <a:t>Analysis lens | general</a:t>
-            </a:r>
-          </a:p>
-          <a:p>
-            <a:r>
-              <a:t>Original SHA-256 | 17442d095e61a319e806d0a58993fcb5b4a89705867bda5ead74b82bec4b8add</a:t>
-            </a:r>
-          </a:p>
-          <a:p>
-            <a:r>
-              <a:t>Ingestion note 1 | Recomputed locally from saved LLM replies acquired at 2026-09-25T11:22:07+00:00 under method publication-repair-2026-09-24.3. Original report ae05de4f-1d78-4c71-85a5-9a9e833d7306 is preserved. No new provider requests. The original analysis used a source-labelled filename; this is not a source-blind comparison.</a:t>
-            </a:r>
-          </a:p>
-          <a:p>
-            <a:r>
-              <a:t>Ingestion note 2 | Presentation copy of saved report a7209748-4dcd-4092-898a-e2a5dc6c475f. The descriptive filename replaces the earlier example ID for navigation. Original analysis dates, provider replies, scores and acquisition context are retained; no new model analysis.</a:t>
+              <a:t>Ingestion note 1 | Fresh provider replies acquired for eleven-examples-refresh-20260926-r1; report assembled locally from the saved responses without further API calls.</a:t>
+            </a:r>
+          </a:p>
+          <a:p>
+            <a:r>
+              <a:t>Ingestion note 2 | Provider latency values are restored from the acquisition receipts (maximum sampled-frame latency per provider); raw replies and assessment results are unchanged by this bookkeeping step.</a:t>
             </a:r>
           </a:p>
         </p:txBody>
@@ -1604,7 +1478,7 @@
           </a:p>
           <a:p>
             <a:r>
-              <a:t>Indicative rating | 5/100</a:t>
+              <a:t>Indicative rating | 8/100</a:t>
             </a:r>
           </a:p>
           <a:p>
@@ -1709,7 +1583,7 @@
           </a:p>
           <a:p>
             <a:r>
-              <a:t>OpenAI Vision | vision / ok | authentic likely | 5/100</a:t>
+              <a:t>OpenAI Vision | vision / ok | authentic likely | 8/100</a:t>
             </a:r>
           </a:p>
           <a:p>
@@ -1834,52 +1708,47 @@
           </a:p>
           <a:p>
             <a:r>
-              <a:t>Provider summary | synthetic likelihood 5/100; tells: consistent hand-drawn ink linework with natural stroke weight variation, cross-hatched shading at left edge typical of manual/digital-pen editorial cartooning, coherent, correctly spelled hand-lettered text in speech bubble and labels, legible artist signature ('BEELER') with year mark</a:t>
-            </a:r>
-          </a:p>
-          <a:p>
-            <a:r>
-              <a:t>Evidence 1 | Consistent hand-drawn ink linework with natural stroke weight variation</a:t>
-            </a:r>
-          </a:p>
-          <a:p>
-            <a:r>
-              <a:t>Evidence 2 | Cross-hatched shading at left edge typical of manual/digital-pen editorial cartooning</a:t>
-            </a:r>
-          </a:p>
-          <a:p>
-            <a:r>
-              <a:t>Evidence 3 | Coherent, correctly spelled hand-lettered text in speech bubble and labels</a:t>
-            </a:r>
-          </a:p>
-          <a:p>
-            <a:r>
-              <a:t>Evidence 4 | Legible artist signature ('BEELER') with year mark</a:t>
-            </a:r>
-          </a:p>
-          <a:p>
-            <a:r>
-              <a:t>Evidence 5 | Legible syndicate/publication credit ('The Columbus Dispatch', 'CagleCartoons.com')</a:t>
-            </a:r>
-          </a:p>
-          <a:p>
-            <a:r>
-              <a:t>Evidence 6 | Anatomically coherent hands and consistent character styling</a:t>
-            </a:r>
-          </a:p>
-          <a:p>
-            <a:r>
-              <a:t>Evidence 7 | Stylistic consistency with known Nate Beeler editorial cartoons</a:t>
-            </a:r>
-          </a:p>
-          <a:p>
-            <a:r>
-              <a:t>Evidence 8 | No AI texture smearing, garbled glyphs or melted details</a:t>
-            </a:r>
-          </a:p>
-          <a:p>
-            <a:r>
-              <a:t>Evidence 9 | Caveat: Rating is based on visual style only. Illustrations give fewer forensic signals than camera photos, and the image is a recompressed webp. Confirm provenance against the original Cagle Cartoons or Columbus Dispatch publication (circa 2019).</a:t>
+              <a:t>Provider summary | synthetic likelihood 5/100; tells: hand-drawn ink linework with consistent, deliberate pen strokes, coherent, correctly spelled hand-lettered text in speech bubble and labels, legible artist signature and syndication credit (The Columbus Dispatch / CagleCartoons.com, dated '19), cross-hatching texture on left background typical of traditional/digital-inked editorial cartoons</a:t>
+            </a:r>
+          </a:p>
+          <a:p>
+            <a:r>
+              <a:t>Evidence 1 | Hand-drawn ink linework with consistent, deliberate pen strokes</a:t>
+            </a:r>
+          </a:p>
+          <a:p>
+            <a:r>
+              <a:t>Evidence 2 | Coherent, correctly spelled hand-lettered text in speech bubble and labels</a:t>
+            </a:r>
+          </a:p>
+          <a:p>
+            <a:r>
+              <a:t>Evidence 3 | Legible artist signature and syndication credit (The Columbus Dispatch / CagleCartoons.com, dated '19)</a:t>
+            </a:r>
+          </a:p>
+          <a:p>
+            <a:r>
+              <a:t>Evidence 4 | Cross-hatching texture on left background typical of traditional/digital-inked editorial cartoons</a:t>
+            </a:r>
+          </a:p>
+          <a:p>
+            <a:r>
+              <a:t>Evidence 5 | Anatomically coherent hands and consistent character styling</a:t>
+            </a:r>
+          </a:p>
+          <a:p>
+            <a:r>
+              <a:t>Evidence 6 | Stylistic consistency with known editorial cartoonist conventions (Nate Beeler style)</a:t>
+            </a:r>
+          </a:p>
+          <a:p>
+            <a:r>
+              <a:t>Evidence 7 | Compression artifacts consistent with web re-encoding (webp)</a:t>
+            </a:r>
+          </a:p>
+          <a:p>
+            <a:r>
+              <a:t>Evidence 8 | Caveat: Image is a digital illustration, not a photo, so camera-based forensic signals do not apply; origin assessment relies on stylistic and signature cues, and a human should verify against the original syndicated publication (CagleCartoons, 2019) to rule out alterations.</a:t>
             </a:r>
           </a:p>
         </p:txBody>
@@ -1989,52 +1858,47 @@
           </a:p>
           <a:p>
             <a:r>
-              <a:t>Provider summary | synthetic likelihood 5/100; tells: consistent hand-drawn ink linework with natural stroke weight variation, cross-hatched shading at left edge typical of manual/digital-pen editorial cartooning, coherent, correctly spelled hand-lettered text in speech bubble and labels, legible artist signature ('BEELER') with year mark</a:t>
-            </a:r>
-          </a:p>
-          <a:p>
-            <a:r>
-              <a:t>Evidence 1 | Consistent hand-drawn ink linework with natural stroke weight variation</a:t>
-            </a:r>
-          </a:p>
-          <a:p>
-            <a:r>
-              <a:t>Evidence 2 | Cross-hatched shading at left edge typical of manual/digital-pen editorial cartooning</a:t>
-            </a:r>
-          </a:p>
-          <a:p>
-            <a:r>
-              <a:t>Evidence 3 | Coherent, correctly spelled hand-lettered text in speech bubble and labels</a:t>
-            </a:r>
-          </a:p>
-          <a:p>
-            <a:r>
-              <a:t>Evidence 4 | Legible artist signature ('BEELER') with year mark</a:t>
-            </a:r>
-          </a:p>
-          <a:p>
-            <a:r>
-              <a:t>Evidence 5 | Legible syndicate/publication credit ('The Columbus Dispatch', 'CagleCartoons.com')</a:t>
-            </a:r>
-          </a:p>
-          <a:p>
-            <a:r>
-              <a:t>Evidence 6 | Anatomically coherent hands and consistent character styling</a:t>
-            </a:r>
-          </a:p>
-          <a:p>
-            <a:r>
-              <a:t>Evidence 7 | Stylistic consistency with known Nate Beeler editorial cartoons</a:t>
-            </a:r>
-          </a:p>
-          <a:p>
-            <a:r>
-              <a:t>Evidence 8 | No AI texture smearing, garbled glyphs or melted details</a:t>
-            </a:r>
-          </a:p>
-          <a:p>
-            <a:r>
-              <a:t>Evidence 9 | Caveat: Rating is based on visual style only. Illustrations give fewer forensic signals than camera photos, and the image is a recompressed webp. Confirm provenance against the original Cagle Cartoons or Columbus Dispatch publication (circa 2019).</a:t>
+              <a:t>Provider summary | synthetic likelihood 5/100; tells: hand-drawn ink linework with consistent, deliberate pen strokes, coherent, correctly spelled hand-lettered text in speech bubble and labels, legible artist signature and syndication credit (The Columbus Dispatch / CagleCartoons.com, dated '19), cross-hatching texture on left background typical of traditional/digital-inked editorial cartoons</a:t>
+            </a:r>
+          </a:p>
+          <a:p>
+            <a:r>
+              <a:t>Evidence 1 | Hand-drawn ink linework with consistent, deliberate pen strokes</a:t>
+            </a:r>
+          </a:p>
+          <a:p>
+            <a:r>
+              <a:t>Evidence 2 | Coherent, correctly spelled hand-lettered text in speech bubble and labels</a:t>
+            </a:r>
+          </a:p>
+          <a:p>
+            <a:r>
+              <a:t>Evidence 3 | Legible artist signature and syndication credit (The Columbus Dispatch / CagleCartoons.com, dated '19)</a:t>
+            </a:r>
+          </a:p>
+          <a:p>
+            <a:r>
+              <a:t>Evidence 4 | Cross-hatching texture on left background typical of traditional/digital-inked editorial cartoons</a:t>
+            </a:r>
+          </a:p>
+          <a:p>
+            <a:r>
+              <a:t>Evidence 5 | Anatomically coherent hands and consistent character styling</a:t>
+            </a:r>
+          </a:p>
+          <a:p>
+            <a:r>
+              <a:t>Evidence 6 | Stylistic consistency with known editorial cartoonist conventions (Nate Beeler style)</a:t>
+            </a:r>
+          </a:p>
+          <a:p>
+            <a:r>
+              <a:t>Evidence 7 | Compression artifacts consistent with web re-encoding (webp)</a:t>
+            </a:r>
+          </a:p>
+          <a:p>
+            <a:r>
+              <a:t>Evidence 8 | Caveat: Image is a digital illustration, not a photo, so camera-based forensic signals do not apply; origin assessment relies on stylistic and signature cues, and a human should verify against the original syndicated publication (CagleCartoons, 2019) to rule out alterations.</a:t>
             </a:r>
           </a:p>
         </p:txBody>
@@ -2144,32 +2008,37 @@
           </a:p>
           <a:p>
             <a:r>
-              <a:t>Provider summary | synthetic likelihood 5/100; tells: Consistent pen-and-ink outlines and crosshatched shading throughout the cartoon, Coherent, legible hand-lettered speech and disease labels, Deliberate caricature proportions and integrated symbolic virus heads, Visible publication credit and artist signature</a:t>
-            </a:r>
-          </a:p>
-          <a:p>
-            <a:r>
-              <a:t>Evidence 1 | Consistent pen-and-ink outlines and crosshatched shading throughout the cartoon</a:t>
-            </a:r>
-          </a:p>
-          <a:p>
-            <a:r>
-              <a:t>Evidence 2 | Coherent, legible hand-lettered speech and disease labels</a:t>
-            </a:r>
-          </a:p>
-          <a:p>
-            <a:r>
-              <a:t>Evidence 3 | Deliberate caricature proportions and integrated symbolic virus heads</a:t>
-            </a:r>
-          </a:p>
-          <a:p>
-            <a:r>
-              <a:t>Evidence 4 | Visible publication credit and artist signature</a:t>
-            </a:r>
-          </a:p>
-          <a:p>
-            <a:r>
-              <a:t>Evidence 5 | Caveat: Appears to be a conventional editorial illustration, not a camera photo; visual inspection alone cannot verify authorship or exclude AI edits, and the stylized signature/date are difficult to read.</a:t>
+              <a:t>Provider summary | synthetic likelihood 8/100; tells: Consistent editorial-cartoon ink outlines and crosshatching, Coherent hand-lettered speech and disease labels, Deliberate, consistent caricature proportions, Integrated publication credit and artist signature</a:t>
+            </a:r>
+          </a:p>
+          <a:p>
+            <a:r>
+              <a:t>Evidence 1 | Consistent editorial-cartoon ink outlines and crosshatching</a:t>
+            </a:r>
+          </a:p>
+          <a:p>
+            <a:r>
+              <a:t>Evidence 2 | Coherent hand-lettered speech and disease labels</a:t>
+            </a:r>
+          </a:p>
+          <a:p>
+            <a:r>
+              <a:t>Evidence 3 | Deliberate, consistent caricature proportions</a:t>
+            </a:r>
+          </a:p>
+          <a:p>
+            <a:r>
+              <a:t>Evidence 4 | Integrated publication credit and artist signature</a:t>
+            </a:r>
+          </a:p>
+          <a:p>
+            <a:r>
+              <a:t>Evidence 5 | No conspicuous generative texture or lettering artifacts</a:t>
+            </a:r>
+          </a:p>
+          <a:p>
+            <a:r>
+              <a:t>Evidence 6 | Caveat: This is an illustration, not a camera photograph; style and signature alone cannot establish human authorship or exclude AI editing.</a:t>
             </a:r>
           </a:p>
         </p:txBody>
@@ -2279,32 +2148,37 @@
           </a:p>
           <a:p>
             <a:r>
-              <a:t>Provider summary | synthetic likelihood 5/100; tells: Consistent pen-and-ink outlines and crosshatched shading throughout the cartoon, Coherent, legible hand-lettered speech and disease labels, Deliberate caricature proportions and integrated symbolic virus heads, Visible publication credit and artist signature</a:t>
-            </a:r>
-          </a:p>
-          <a:p>
-            <a:r>
-              <a:t>Evidence 1 | Consistent pen-and-ink outlines and crosshatched shading throughout the cartoon</a:t>
-            </a:r>
-          </a:p>
-          <a:p>
-            <a:r>
-              <a:t>Evidence 2 | Coherent, legible hand-lettered speech and disease labels</a:t>
-            </a:r>
-          </a:p>
-          <a:p>
-            <a:r>
-              <a:t>Evidence 3 | Deliberate caricature proportions and integrated symbolic virus heads</a:t>
-            </a:r>
-          </a:p>
-          <a:p>
-            <a:r>
-              <a:t>Evidence 4 | Visible publication credit and artist signature</a:t>
-            </a:r>
-          </a:p>
-          <a:p>
-            <a:r>
-              <a:t>Evidence 5 | Caveat: Appears to be a conventional editorial illustration, not a camera photo; visual inspection alone cannot verify authorship or exclude AI edits, and the stylized signature/date are difficult to read.</a:t>
+              <a:t>Provider summary | synthetic likelihood 8/100; tells: Consistent editorial-cartoon ink outlines and crosshatching, Coherent hand-lettered speech and disease labels, Deliberate, consistent caricature proportions, Integrated publication credit and artist signature</a:t>
+            </a:r>
+          </a:p>
+          <a:p>
+            <a:r>
+              <a:t>Evidence 1 | Consistent editorial-cartoon ink outlines and crosshatching</a:t>
+            </a:r>
+          </a:p>
+          <a:p>
+            <a:r>
+              <a:t>Evidence 2 | Coherent hand-lettered speech and disease labels</a:t>
+            </a:r>
+          </a:p>
+          <a:p>
+            <a:r>
+              <a:t>Evidence 3 | Deliberate, consistent caricature proportions</a:t>
+            </a:r>
+          </a:p>
+          <a:p>
+            <a:r>
+              <a:t>Evidence 4 | Integrated publication credit and artist signature</a:t>
+            </a:r>
+          </a:p>
+          <a:p>
+            <a:r>
+              <a:t>Evidence 5 | No conspicuous generative texture or lettering artifacts</a:t>
+            </a:r>
+          </a:p>
+          <a:p>
+            <a:r>
+              <a:t>Evidence 6 | Caveat: This is an illustration, not a camera photograph; style and signature alone cannot establish human authorship or exclude AI editing.</a:t>
             </a:r>
           </a:p>
         </p:txBody>
@@ -2414,32 +2288,32 @@
           </a:p>
           <a:p>
             <a:r>
-              <a:t>Provider summary | synthetic likelihood 25/100; tells: consistent editorial cartoon linework, artist signature and syndication text, hand-drawn hatching and crosshatching, coherent hand lettering</a:t>
-            </a:r>
-          </a:p>
-          <a:p>
-            <a:r>
-              <a:t>Evidence 1 | Consistent editorial cartoon linework</a:t>
-            </a:r>
-          </a:p>
-          <a:p>
-            <a:r>
-              <a:t>Evidence 2 | Artist signature and syndication text</a:t>
-            </a:r>
-          </a:p>
-          <a:p>
-            <a:r>
-              <a:t>Evidence 3 | Hand-drawn hatching and crosshatching</a:t>
-            </a:r>
-          </a:p>
-          <a:p>
-            <a:r>
-              <a:t>Evidence 4 | Coherent hand lettering</a:t>
-            </a:r>
-          </a:p>
-          <a:p>
-            <a:r>
-              <a:t>Evidence 5 | Caveat: Editorial illustrations follow stylistic conventions distinct from photographic media, which automated detectors may mischaracterize.</a:t>
+              <a:t>Provider summary | synthetic likelihood 25/100; tells: consistent hand-drawn editorial cartoon style, legible artist signature and syndicate attribution, coherent crosshatching and ink work, absence of diffusion generation artifacts</a:t>
+            </a:r>
+          </a:p>
+          <a:p>
+            <a:r>
+              <a:t>Evidence 1 | Consistent hand-drawn editorial cartoon style</a:t>
+            </a:r>
+          </a:p>
+          <a:p>
+            <a:r>
+              <a:t>Evidence 2 | Legible artist signature and syndicate attribution</a:t>
+            </a:r>
+          </a:p>
+          <a:p>
+            <a:r>
+              <a:t>Evidence 3 | Coherent crosshatching and ink work</a:t>
+            </a:r>
+          </a:p>
+          <a:p>
+            <a:r>
+              <a:t>Evidence 4 | Absence of diffusion generation artifacts</a:t>
+            </a:r>
+          </a:p>
+          <a:p>
+            <a:r>
+              <a:t>Evidence 5 | Caveat: Editorial illustrations are non-photographic, requiring human review to confirm original publication provenance.</a:t>
             </a:r>
           </a:p>
         </p:txBody>
@@ -2549,32 +2423,32 @@
           </a:p>
           <a:p>
             <a:r>
-              <a:t>Provider summary | synthetic likelihood 25/100; tells: consistent editorial cartoon linework, artist signature and syndication text, hand-drawn hatching and crosshatching, coherent hand lettering</a:t>
-            </a:r>
-          </a:p>
-          <a:p>
-            <a:r>
-              <a:t>Evidence 1 | Consistent editorial cartoon linework</a:t>
-            </a:r>
-          </a:p>
-          <a:p>
-            <a:r>
-              <a:t>Evidence 2 | Artist signature and syndication text</a:t>
-            </a:r>
-          </a:p>
-          <a:p>
-            <a:r>
-              <a:t>Evidence 3 | Hand-drawn hatching and crosshatching</a:t>
-            </a:r>
-          </a:p>
-          <a:p>
-            <a:r>
-              <a:t>Evidence 4 | Coherent hand lettering</a:t>
-            </a:r>
-          </a:p>
-          <a:p>
-            <a:r>
-              <a:t>Evidence 5 | Caveat: Editorial illustrations follow stylistic conventions distinct from photographic media, which automated detectors may mischaracterize.</a:t>
+              <a:t>Provider summary | synthetic likelihood 25/100; tells: consistent hand-drawn editorial cartoon style, legible artist signature and syndicate attribution, coherent crosshatching and ink work, absence of diffusion generation artifacts</a:t>
+            </a:r>
+          </a:p>
+          <a:p>
+            <a:r>
+              <a:t>Evidence 1 | Consistent hand-drawn editorial cartoon style</a:t>
+            </a:r>
+          </a:p>
+          <a:p>
+            <a:r>
+              <a:t>Evidence 2 | Legible artist signature and syndicate attribution</a:t>
+            </a:r>
+          </a:p>
+          <a:p>
+            <a:r>
+              <a:t>Evidence 3 | Coherent crosshatching and ink work</a:t>
+            </a:r>
+          </a:p>
+          <a:p>
+            <a:r>
+              <a:t>Evidence 4 | Absence of diffusion generation artifacts</a:t>
+            </a:r>
+          </a:p>
+          <a:p>
+            <a:r>
+              <a:t>Evidence 5 | Caveat: Editorial illustrations are non-photographic, requiring human review to confirm original publication provenance.</a:t>
             </a:r>
           </a:p>
         </p:txBody>
@@ -8932,7 +8806,7 @@
         </p:nvGraphicFramePr>
         <p:xfrm>
           <a:off x="365760" y="1700784"/>
-          <a:ext cx="8412479" cy="959103"/>
+          <a:ext cx="8412479" cy="1162304"/>
         </p:xfrm>
         <a:graphic>
           <a:graphicData uri="http://schemas.openxmlformats.org/drawingml/2006/table">
@@ -8944,7 +8818,7 @@
                 <a:gridCol w="2271369"/>
                 <a:gridCol w="6141110"/>
               </a:tblGrid>
-              <a:tr h="959103">
+              <a:tr h="1162304">
                 <a:tc>
                   <a:txBody>
                     <a:bodyPr wrap="none"/>
@@ -8995,64 +8869,83 @@
                         </a:defRPr>
                       </a:pPr>
                       <a:r>
-                        <a:t>synthetic likelihood 5/100; tells: consistent hand-drawn ink linework with natural</a:t>
-                      </a:r>
-                    </a:p>
-                    <a:p>
-                      <a:pPr>
-                        <a:lnSpc>
-                          <a:spcPts val="1600"/>
-                        </a:lnSpc>
-                        <a:spcAft>
-                          <a:spcPts val="0"/>
-                        </a:spcAft>
-                        <a:defRPr sz="1200" b="0">
-                          <a:solidFill>
-                            <a:srgbClr val="21243A"/>
-                          </a:solidFill>
-                          <a:latin typeface="Arial"/>
-                        </a:defRPr>
-                      </a:pPr>
-                      <a:r>
-                        <a:t>stroke weight variation, cross-hatched shading at left edge typical of</a:t>
-                      </a:r>
-                    </a:p>
-                    <a:p>
-                      <a:pPr>
-                        <a:lnSpc>
-                          <a:spcPts val="1600"/>
-                        </a:lnSpc>
-                        <a:spcAft>
-                          <a:spcPts val="0"/>
-                        </a:spcAft>
-                        <a:defRPr sz="1200" b="0">
-                          <a:solidFill>
-                            <a:srgbClr val="21243A"/>
-                          </a:solidFill>
-                          <a:latin typeface="Arial"/>
-                        </a:defRPr>
-                      </a:pPr>
-                      <a:r>
-                        <a:t>manual/digital-pen editorial cartooning, coherent, correctly spelled hand-lettered</a:t>
-                      </a:r>
-                    </a:p>
-                    <a:p>
-                      <a:pPr>
-                        <a:lnSpc>
-                          <a:spcPts val="1600"/>
-                        </a:lnSpc>
-                        <a:spcAft>
-                          <a:spcPts val="0"/>
-                        </a:spcAft>
-                        <a:defRPr sz="1200" b="0">
-                          <a:solidFill>
-                            <a:srgbClr val="21243A"/>
-                          </a:solidFill>
-                          <a:latin typeface="Arial"/>
-                        </a:defRPr>
-                      </a:pPr>
-                      <a:r>
-                        <a:t>text in speech bubble and labels, legible artist signature ('BEELER') with year mark</a:t>
+                        <a:t>synthetic likelihood 5/100; tells: hand-drawn ink linework with consistent,</a:t>
+                      </a:r>
+                    </a:p>
+                    <a:p>
+                      <a:pPr>
+                        <a:lnSpc>
+                          <a:spcPts val="1600"/>
+                        </a:lnSpc>
+                        <a:spcAft>
+                          <a:spcPts val="0"/>
+                        </a:spcAft>
+                        <a:defRPr sz="1200" b="0">
+                          <a:solidFill>
+                            <a:srgbClr val="21243A"/>
+                          </a:solidFill>
+                          <a:latin typeface="Arial"/>
+                        </a:defRPr>
+                      </a:pPr>
+                      <a:r>
+                        <a:t>deliberate pen strokes, coherent, correctly spelled hand-lettered text in speech</a:t>
+                      </a:r>
+                    </a:p>
+                    <a:p>
+                      <a:pPr>
+                        <a:lnSpc>
+                          <a:spcPts val="1600"/>
+                        </a:lnSpc>
+                        <a:spcAft>
+                          <a:spcPts val="0"/>
+                        </a:spcAft>
+                        <a:defRPr sz="1200" b="0">
+                          <a:solidFill>
+                            <a:srgbClr val="21243A"/>
+                          </a:solidFill>
+                          <a:latin typeface="Arial"/>
+                        </a:defRPr>
+                      </a:pPr>
+                      <a:r>
+                        <a:t>bubble and labels, legible artist signature and syndication credit (The Columbus</a:t>
+                      </a:r>
+                    </a:p>
+                    <a:p>
+                      <a:pPr>
+                        <a:lnSpc>
+                          <a:spcPts val="1600"/>
+                        </a:lnSpc>
+                        <a:spcAft>
+                          <a:spcPts val="0"/>
+                        </a:spcAft>
+                        <a:defRPr sz="1200" b="0">
+                          <a:solidFill>
+                            <a:srgbClr val="21243A"/>
+                          </a:solidFill>
+                          <a:latin typeface="Arial"/>
+                        </a:defRPr>
+                      </a:pPr>
+                      <a:r>
+                        <a:t>Dispatch / CagleCartoons.com, dated '19), cross-hatching texture on left</a:t>
+                      </a:r>
+                    </a:p>
+                    <a:p>
+                      <a:pPr>
+                        <a:lnSpc>
+                          <a:spcPts val="1600"/>
+                        </a:lnSpc>
+                        <a:spcAft>
+                          <a:spcPts val="0"/>
+                        </a:spcAft>
+                        <a:defRPr sz="1200" b="0">
+                          <a:solidFill>
+                            <a:srgbClr val="21243A"/>
+                          </a:solidFill>
+                          <a:latin typeface="Arial"/>
+                        </a:defRPr>
+                      </a:pPr>
+                      <a:r>
+                        <a:t>background typical of traditional/digital-inked editorial cartoons</a:t>
                       </a:r>
                     </a:p>
                   </a:txBody>
@@ -9076,7 +8969,7 @@
           <p:nvPr/>
         </p:nvGraphicFramePr>
         <p:xfrm>
-          <a:off x="365760" y="2659888"/>
+          <a:off x="365760" y="2863088"/>
           <a:ext cx="8412479" cy="959103"/>
         </p:xfrm>
         <a:graphic>
@@ -9140,64 +9033,64 @@
                         </a:defRPr>
                       </a:pPr>
                       <a:r>
-                        <a:t>synthetic likelihood 5/100; tells: Consistent pen-and-ink outlines and crosshatched</a:t>
-                      </a:r>
-                    </a:p>
-                    <a:p>
-                      <a:pPr>
-                        <a:lnSpc>
-                          <a:spcPts val="1600"/>
-                        </a:lnSpc>
-                        <a:spcAft>
-                          <a:spcPts val="0"/>
-                        </a:spcAft>
-                        <a:defRPr sz="1200" b="0">
-                          <a:solidFill>
-                            <a:srgbClr val="21243A"/>
-                          </a:solidFill>
-                          <a:latin typeface="Arial"/>
-                        </a:defRPr>
-                      </a:pPr>
-                      <a:r>
-                        <a:t>shading throughout the cartoon, Coherent, legible hand-lettered speech and</a:t>
-                      </a:r>
-                    </a:p>
-                    <a:p>
-                      <a:pPr>
-                        <a:lnSpc>
-                          <a:spcPts val="1600"/>
-                        </a:lnSpc>
-                        <a:spcAft>
-                          <a:spcPts val="0"/>
-                        </a:spcAft>
-                        <a:defRPr sz="1200" b="0">
-                          <a:solidFill>
-                            <a:srgbClr val="21243A"/>
-                          </a:solidFill>
-                          <a:latin typeface="Arial"/>
-                        </a:defRPr>
-                      </a:pPr>
-                      <a:r>
-                        <a:t>disease labels, Deliberate caricature proportions and integrated symbolic virus</a:t>
-                      </a:r>
-                    </a:p>
-                    <a:p>
-                      <a:pPr>
-                        <a:lnSpc>
-                          <a:spcPts val="1600"/>
-                        </a:lnSpc>
-                        <a:spcAft>
-                          <a:spcPts val="0"/>
-                        </a:spcAft>
-                        <a:defRPr sz="1200" b="0">
-                          <a:solidFill>
-                            <a:srgbClr val="21243A"/>
-                          </a:solidFill>
-                          <a:latin typeface="Arial"/>
-                        </a:defRPr>
-                      </a:pPr>
-                      <a:r>
-                        <a:t>heads, Visible publication credit and artist signature</a:t>
+                        <a:t>synthetic likelihood 8/100; tells: Consistent editorial-cartoon ink outlines and</a:t>
+                      </a:r>
+                    </a:p>
+                    <a:p>
+                      <a:pPr>
+                        <a:lnSpc>
+                          <a:spcPts val="1600"/>
+                        </a:lnSpc>
+                        <a:spcAft>
+                          <a:spcPts val="0"/>
+                        </a:spcAft>
+                        <a:defRPr sz="1200" b="0">
+                          <a:solidFill>
+                            <a:srgbClr val="21243A"/>
+                          </a:solidFill>
+                          <a:latin typeface="Arial"/>
+                        </a:defRPr>
+                      </a:pPr>
+                      <a:r>
+                        <a:t>crosshatching, Coherent hand-lettered speech and disease labels, Deliberate,</a:t>
+                      </a:r>
+                    </a:p>
+                    <a:p>
+                      <a:pPr>
+                        <a:lnSpc>
+                          <a:spcPts val="1600"/>
+                        </a:lnSpc>
+                        <a:spcAft>
+                          <a:spcPts val="0"/>
+                        </a:spcAft>
+                        <a:defRPr sz="1200" b="0">
+                          <a:solidFill>
+                            <a:srgbClr val="21243A"/>
+                          </a:solidFill>
+                          <a:latin typeface="Arial"/>
+                        </a:defRPr>
+                      </a:pPr>
+                      <a:r>
+                        <a:t>consistent caricature proportions, Integrated publication credit and artist</a:t>
+                      </a:r>
+                    </a:p>
+                    <a:p>
+                      <a:pPr>
+                        <a:lnSpc>
+                          <a:spcPts val="1600"/>
+                        </a:lnSpc>
+                        <a:spcAft>
+                          <a:spcPts val="0"/>
+                        </a:spcAft>
+                        <a:defRPr sz="1200" b="0">
+                          <a:solidFill>
+                            <a:srgbClr val="21243A"/>
+                          </a:solidFill>
+                          <a:latin typeface="Arial"/>
+                        </a:defRPr>
+                      </a:pPr>
+                      <a:r>
+                        <a:t>signature</a:t>
                       </a:r>
                     </a:p>
                   </a:txBody>
@@ -9221,7 +9114,7 @@
           <p:nvPr/>
         </p:nvGraphicFramePr>
         <p:xfrm>
-          <a:off x="365760" y="3618991"/>
+          <a:off x="365760" y="3822191"/>
           <a:ext cx="8412479" cy="755904"/>
         </p:xfrm>
         <a:graphic>
@@ -9285,45 +9178,45 @@
                         </a:defRPr>
                       </a:pPr>
                       <a:r>
-                        <a:t>synthetic likelihood 25/100; tells: consistent editorial cartoon linework, artist</a:t>
-                      </a:r>
-                    </a:p>
-                    <a:p>
-                      <a:pPr>
-                        <a:lnSpc>
-                          <a:spcPts val="1600"/>
-                        </a:lnSpc>
-                        <a:spcAft>
-                          <a:spcPts val="0"/>
-                        </a:spcAft>
-                        <a:defRPr sz="1200" b="0">
-                          <a:solidFill>
-                            <a:srgbClr val="21243A"/>
-                          </a:solidFill>
-                          <a:latin typeface="Arial"/>
-                        </a:defRPr>
-                      </a:pPr>
-                      <a:r>
-                        <a:t>signature and syndication text, hand-drawn hatching and crosshatching, coherent</a:t>
-                      </a:r>
-                    </a:p>
-                    <a:p>
-                      <a:pPr>
-                        <a:lnSpc>
-                          <a:spcPts val="1600"/>
-                        </a:lnSpc>
-                        <a:spcAft>
-                          <a:spcPts val="0"/>
-                        </a:spcAft>
-                        <a:defRPr sz="1200" b="0">
-                          <a:solidFill>
-                            <a:srgbClr val="21243A"/>
-                          </a:solidFill>
-                          <a:latin typeface="Arial"/>
-                        </a:defRPr>
-                      </a:pPr>
-                      <a:r>
-                        <a:t>hand lettering</a:t>
+                        <a:t>synthetic likelihood 25/100; tells: consistent hand-drawn editorial cartoon style,</a:t>
+                      </a:r>
+                    </a:p>
+                    <a:p>
+                      <a:pPr>
+                        <a:lnSpc>
+                          <a:spcPts val="1600"/>
+                        </a:lnSpc>
+                        <a:spcAft>
+                          <a:spcPts val="0"/>
+                        </a:spcAft>
+                        <a:defRPr sz="1200" b="0">
+                          <a:solidFill>
+                            <a:srgbClr val="21243A"/>
+                          </a:solidFill>
+                          <a:latin typeface="Arial"/>
+                        </a:defRPr>
+                      </a:pPr>
+                      <a:r>
+                        <a:t>legible artist signature and syndicate attribution, coherent crosshatching and ink</a:t>
+                      </a:r>
+                    </a:p>
+                    <a:p>
+                      <a:pPr>
+                        <a:lnSpc>
+                          <a:spcPts val="1600"/>
+                        </a:lnSpc>
+                        <a:spcAft>
+                          <a:spcPts val="0"/>
+                        </a:spcAft>
+                        <a:defRPr sz="1200" b="0">
+                          <a:solidFill>
+                            <a:srgbClr val="21243A"/>
+                          </a:solidFill>
+                          <a:latin typeface="Arial"/>
+                        </a:defRPr>
+                      </a:pPr>
+                      <a:r>
+                        <a:t>work, absence of diffusion generation artifacts</a:t>
                       </a:r>
                     </a:p>
                   </a:txBody>
@@ -10072,7 +9965,7 @@
         </p:nvGraphicFramePr>
         <p:xfrm>
           <a:off x="365760" y="1700784"/>
-          <a:ext cx="8412479" cy="552704"/>
+          <a:ext cx="8412479" cy="755904"/>
         </p:xfrm>
         <a:graphic>
           <a:graphicData uri="http://schemas.openxmlformats.org/drawingml/2006/table">
@@ -10084,7 +9977,7 @@
                 <a:gridCol w="2271369"/>
                 <a:gridCol w="6141110"/>
               </a:tblGrid>
-              <a:tr h="552704">
+              <a:tr h="755904">
                 <a:tc>
                   <a:txBody>
                     <a:bodyPr wrap="none"/>
@@ -10135,26 +10028,45 @@
                         </a:defRPr>
                       </a:pPr>
                       <a:r>
-                        <a:t>I REJECT VACCINES OUT OF LOVE FOR MY CHILDREN. | VAX | MEASLES | MUMPS |</a:t>
-                      </a:r>
-                    </a:p>
-                    <a:p>
-                      <a:pPr>
-                        <a:lnSpc>
-                          <a:spcPts val="1600"/>
-                        </a:lnSpc>
-                        <a:spcAft>
-                          <a:spcPts val="0"/>
-                        </a:spcAft>
-                        <a:defRPr sz="1200" b="0">
-                          <a:solidFill>
-                            <a:srgbClr val="21243A"/>
-                          </a:solidFill>
-                          <a:latin typeface="Arial"/>
-                        </a:defRPr>
-                      </a:pPr>
-                      <a:r>
-                        <a:t>RUBELLA | THE COLUMBUS DISPATCH CAGLECARTOONS.com | BEELER ©19</a:t>
+                        <a:t>THE COLUMBUS DISPATCH CAGLECARTOONS.COM Beeler 2019 / I REJECT</a:t>
+                      </a:r>
+                    </a:p>
+                    <a:p>
+                      <a:pPr>
+                        <a:lnSpc>
+                          <a:spcPts val="1600"/>
+                        </a:lnSpc>
+                        <a:spcAft>
+                          <a:spcPts val="0"/>
+                        </a:spcAft>
+                        <a:defRPr sz="1200" b="0">
+                          <a:solidFill>
+                            <a:srgbClr val="21243A"/>
+                          </a:solidFill>
+                          <a:latin typeface="Arial"/>
+                        </a:defRPr>
+                      </a:pPr>
+                      <a:r>
+                        <a:t>VACCINES OUT OF LOVE FOR MY CHILDREN. / NO VAX / MEASLES / MUMPS /</a:t>
+                      </a:r>
+                    </a:p>
+                    <a:p>
+                      <a:pPr>
+                        <a:lnSpc>
+                          <a:spcPts val="1600"/>
+                        </a:lnSpc>
+                        <a:spcAft>
+                          <a:spcPts val="0"/>
+                        </a:spcAft>
+                        <a:defRPr sz="1200" b="0">
+                          <a:solidFill>
+                            <a:srgbClr val="21243A"/>
+                          </a:solidFill>
+                          <a:latin typeface="Arial"/>
+                        </a:defRPr>
+                      </a:pPr>
+                      <a:r>
+                        <a:t>RUBELLA</a:t>
                       </a:r>
                     </a:p>
                   </a:txBody>
@@ -11218,7 +11130,7 @@
                         </a:defRPr>
                       </a:pPr>
                       <a:r>
-                        <a:t>e716b5d1-879a-47a3-8409-9343f8dc749d</a:t>
+                        <a:t>b5d4ff88-8488-45f9-af47-300bcc02ff34</a:t>
                       </a:r>
                     </a:p>
                   </a:txBody>
@@ -11306,7 +11218,7 @@
                         </a:defRPr>
                       </a:pPr>
                       <a:r>
-                        <a:t>2026-09-26T18:37:51+00:00</a:t>
+                        <a:t>2026-09-26T22:31:04+00:00</a:t>
                       </a:r>
                     </a:p>
                   </a:txBody>
@@ -11570,7 +11482,7 @@
                         </a:defRPr>
                       </a:pPr>
                       <a:r>
-                        <a:t>verdict-consistency-2026-09-26.1</a:t>
+                        <a:t>pdf-preparation-2026-09-26.1</a:t>
                       </a:r>
                     </a:p>
                   </a:txBody>
@@ -11771,7 +11683,7 @@
         </p:nvGraphicFramePr>
         <p:xfrm>
           <a:off x="365760" y="4496816"/>
-          <a:ext cx="8412479" cy="1162304"/>
+          <a:ext cx="8412479" cy="552704"/>
         </p:xfrm>
         <a:graphic>
           <a:graphicData uri="http://schemas.openxmlformats.org/drawingml/2006/table">
@@ -11783,7 +11695,7 @@
                 <a:gridCol w="2271369"/>
                 <a:gridCol w="6141110"/>
               </a:tblGrid>
-              <a:tr h="1162304">
+              <a:tr h="552704">
                 <a:tc>
                   <a:txBody>
                     <a:bodyPr wrap="none"/>
@@ -11834,83 +11746,26 @@
                         </a:defRPr>
                       </a:pPr>
                       <a:r>
-                        <a:t>Recomputed locally from saved LLM replies acquired at</a:t>
-                      </a:r>
-                    </a:p>
-                    <a:p>
-                      <a:pPr>
-                        <a:lnSpc>
-                          <a:spcPts val="1600"/>
-                        </a:lnSpc>
-                        <a:spcAft>
-                          <a:spcPts val="0"/>
-                        </a:spcAft>
-                        <a:defRPr sz="1200" b="0">
-                          <a:solidFill>
-                            <a:srgbClr val="21243A"/>
-                          </a:solidFill>
-                          <a:latin typeface="Arial"/>
-                        </a:defRPr>
-                      </a:pPr>
-                      <a:r>
-                        <a:t>2026-09-25T11:22:07+00:00 under method publication-repair-2026-09-24.3.</a:t>
-                      </a:r>
-                    </a:p>
-                    <a:p>
-                      <a:pPr>
-                        <a:lnSpc>
-                          <a:spcPts val="1600"/>
-                        </a:lnSpc>
-                        <a:spcAft>
-                          <a:spcPts val="0"/>
-                        </a:spcAft>
-                        <a:defRPr sz="1200" b="0">
-                          <a:solidFill>
-                            <a:srgbClr val="21243A"/>
-                          </a:solidFill>
-                          <a:latin typeface="Arial"/>
-                        </a:defRPr>
-                      </a:pPr>
-                      <a:r>
-                        <a:t>Original report ae05de4f-1d78-4c71-85a5-9a9e833d7306 is preserved. No new</a:t>
-                      </a:r>
-                    </a:p>
-                    <a:p>
-                      <a:pPr>
-                        <a:lnSpc>
-                          <a:spcPts val="1600"/>
-                        </a:lnSpc>
-                        <a:spcAft>
-                          <a:spcPts val="0"/>
-                        </a:spcAft>
-                        <a:defRPr sz="1200" b="0">
-                          <a:solidFill>
-                            <a:srgbClr val="21243A"/>
-                          </a:solidFill>
-                          <a:latin typeface="Arial"/>
-                        </a:defRPr>
-                      </a:pPr>
-                      <a:r>
-                        <a:t>provider requests. The original analysis used a source-labelled filename; this is not</a:t>
-                      </a:r>
-                    </a:p>
-                    <a:p>
-                      <a:pPr>
-                        <a:lnSpc>
-                          <a:spcPts val="1600"/>
-                        </a:lnSpc>
-                        <a:spcAft>
-                          <a:spcPts val="0"/>
-                        </a:spcAft>
-                        <a:defRPr sz="1200" b="0">
-                          <a:solidFill>
-                            <a:srgbClr val="21243A"/>
-                          </a:solidFill>
-                          <a:latin typeface="Arial"/>
-                        </a:defRPr>
-                      </a:pPr>
-                      <a:r>
-                        <a:t>a source-blind comparison.</a:t>
+                        <a:t>Fresh provider replies acquired for eleven-examples-refresh-20260926-r1; report</a:t>
+                      </a:r>
+                    </a:p>
+                    <a:p>
+                      <a:pPr>
+                        <a:lnSpc>
+                          <a:spcPts val="1600"/>
+                        </a:lnSpc>
+                        <a:spcAft>
+                          <a:spcPts val="0"/>
+                        </a:spcAft>
+                        <a:defRPr sz="1200" b="0">
+                          <a:solidFill>
+                            <a:srgbClr val="21243A"/>
+                          </a:solidFill>
+                          <a:latin typeface="Arial"/>
+                        </a:defRPr>
+                      </a:pPr>
+                      <a:r>
+                        <a:t>assembled locally from the saved responses without further API calls.</a:t>
                       </a:r>
                     </a:p>
                   </a:txBody>
@@ -11925,203 +11780,17 @@
           </a:graphicData>
         </a:graphic>
       </p:graphicFrame>
-    </p:spTree>
-  </p:cSld>
-  <p:clrMapOvr>
-    <a:masterClrMapping/>
-  </p:clrMapOvr>
-</p:sld>
-</file>
-
-<file path=ppt/slides/slide18.xml><?xml version="1.0" encoding="utf-8"?>
-<p:sld xmlns:a="http://schemas.openxmlformats.org/drawingml/2006/main" xmlns:p="http://schemas.openxmlformats.org/presentationml/2006/main" xmlns:r="http://schemas.openxmlformats.org/officeDocument/2006/relationships">
-  <p:cSld>
-    <p:spTree>
-      <p:nvGrpSpPr>
-        <p:cNvPr id="1" name=""/>
-        <p:cNvGrpSpPr/>
-        <p:nvPr/>
-      </p:nvGrpSpPr>
-      <p:grpSpPr/>
-      <p:sp>
-        <p:nvSpPr>
-          <p:cNvPr id="2" name="TextBox 1"/>
-          <p:cNvSpPr txBox="1"/>
-          <p:nvPr/>
-        </p:nvSpPr>
-        <p:spPr>
-          <a:xfrm>
-            <a:off x="365760" y="219456"/>
-            <a:ext cx="8412480" cy="228600"/>
-          </a:xfrm>
-          <a:prstGeom prst="rect">
-            <a:avLst/>
-          </a:prstGeom>
-          <a:noFill/>
-        </p:spPr>
-        <p:txBody>
-          <a:bodyPr wrap="square" lIns="0" rIns="0" tIns="0" bIns="0">
-            <a:spAutoFit/>
-          </a:bodyPr>
-          <a:lstStyle/>
-          <a:p>
-            <a:pPr>
-              <a:lnSpc>
-                <a:spcPct val="115000"/>
-              </a:lnSpc>
-              <a:spcAft>
-                <a:spcPts val="0"/>
-              </a:spcAft>
-              <a:defRPr sz="1100" b="1">
-                <a:solidFill>
-                  <a:srgbClr val="C5006A"/>
-                </a:solidFill>
-                <a:latin typeface="Arial"/>
-              </a:defRPr>
-            </a:pPr>
-            <a:r>
-              <a:t>SDA VISION / RESEARCH REPORT</a:t>
-            </a:r>
-          </a:p>
-        </p:txBody>
-      </p:sp>
-      <p:sp>
-        <p:nvSpPr>
-          <p:cNvPr id="3" name="TextBox 2"/>
-          <p:cNvSpPr txBox="1"/>
-          <p:nvPr/>
-        </p:nvSpPr>
-        <p:spPr>
-          <a:xfrm>
-            <a:off x="365760" y="658368"/>
-            <a:ext cx="8412480" cy="612648"/>
-          </a:xfrm>
-          <a:prstGeom prst="rect">
-            <a:avLst/>
-          </a:prstGeom>
-          <a:noFill/>
-        </p:spPr>
-        <p:txBody>
-          <a:bodyPr wrap="square" lIns="0" rIns="0" tIns="0" bIns="0">
-            <a:spAutoFit/>
-          </a:bodyPr>
-          <a:lstStyle/>
-          <a:p>
-            <a:pPr>
-              <a:lnSpc>
-                <a:spcPct val="115000"/>
-              </a:lnSpc>
-              <a:spcAft>
-                <a:spcPts val="0"/>
-              </a:spcAft>
-              <a:defRPr sz="2200" b="1">
-                <a:solidFill>
-                  <a:srgbClr val="21243A"/>
-                </a:solidFill>
-                <a:latin typeface="Arial"/>
-              </a:defRPr>
-            </a:pPr>
-            <a:r>
-              <a:t>File and analysis record (continued)</a:t>
-            </a:r>
-          </a:p>
-        </p:txBody>
-      </p:sp>
-      <p:sp>
-        <p:nvSpPr>
-          <p:cNvPr id="4" name="TextBox 3"/>
-          <p:cNvSpPr txBox="1"/>
-          <p:nvPr/>
-        </p:nvSpPr>
-        <p:spPr>
-          <a:xfrm>
-            <a:off x="365760" y="6291072"/>
-            <a:ext cx="8001000" cy="365760"/>
-          </a:xfrm>
-          <a:prstGeom prst="rect">
-            <a:avLst/>
-          </a:prstGeom>
-          <a:noFill/>
-        </p:spPr>
-        <p:txBody>
-          <a:bodyPr wrap="square" lIns="0" rIns="0" tIns="0" bIns="0">
-            <a:spAutoFit/>
-          </a:bodyPr>
-          <a:lstStyle/>
-          <a:p>
-            <a:pPr>
-              <a:lnSpc>
-                <a:spcPct val="115000"/>
-              </a:lnSpc>
-              <a:spcAft>
-                <a:spcPts val="0"/>
-              </a:spcAft>
-              <a:defRPr sz="800" b="0">
-                <a:solidFill>
-                  <a:srgbClr val="545B6D"/>
-                </a:solidFill>
-                <a:latin typeface="Arial"/>
-              </a:defRPr>
-            </a:pPr>
-            <a:r>
-              <a:t>Research assessment. Ratings are not calibrated probabilities.</a:t>
-            </a:r>
-          </a:p>
-        </p:txBody>
-      </p:sp>
-      <p:sp>
-        <p:nvSpPr>
-          <p:cNvPr id="5" name="TextBox 4"/>
-          <p:cNvSpPr txBox="1"/>
-          <p:nvPr/>
-        </p:nvSpPr>
-        <p:spPr>
-          <a:xfrm>
-            <a:off x="8394192" y="6318504"/>
-            <a:ext cx="365760" cy="228600"/>
-          </a:xfrm>
-          <a:prstGeom prst="rect">
-            <a:avLst/>
-          </a:prstGeom>
-          <a:noFill/>
-        </p:spPr>
-        <p:txBody>
-          <a:bodyPr wrap="square" lIns="0" rIns="0" tIns="0" bIns="0">
-            <a:spAutoFit/>
-          </a:bodyPr>
-          <a:lstStyle/>
-          <a:p>
-            <a:pPr>
-              <a:lnSpc>
-                <a:spcPct val="115000"/>
-              </a:lnSpc>
-              <a:spcAft>
-                <a:spcPts val="0"/>
-              </a:spcAft>
-              <a:defRPr sz="900" b="0">
-                <a:solidFill>
-                  <a:srgbClr val="545B6D"/>
-                </a:solidFill>
-                <a:latin typeface="Arial"/>
-              </a:defRPr>
-            </a:pPr>
-            <a:r>
-              <a:t>18</a:t>
-            </a:r>
-          </a:p>
-        </p:txBody>
-      </p:sp>
       <p:graphicFrame>
         <p:nvGraphicFramePr>
-          <p:cNvPr id="6" name="Table 5"/>
+          <p:cNvPr id="16" name="Table 15"/>
           <p:cNvGraphicFramePr>
             <a:graphicFrameLocks noGrp="1"/>
           </p:cNvGraphicFramePr>
           <p:nvPr/>
         </p:nvGraphicFramePr>
         <p:xfrm>
-          <a:off x="365760" y="1353312"/>
-          <a:ext cx="8412479" cy="347472"/>
+          <a:off x="365760" y="5049520"/>
+          <a:ext cx="8412479" cy="755904"/>
         </p:xfrm>
         <a:graphic>
           <a:graphicData uri="http://schemas.openxmlformats.org/drawingml/2006/table">
@@ -12133,95 +11802,7 @@
                 <a:gridCol w="2271369"/>
                 <a:gridCol w="6141110"/>
               </a:tblGrid>
-              <a:tr h="347472">
-                <a:tc>
-                  <a:txBody>
-                    <a:bodyPr wrap="none"/>
-                    <a:lstStyle/>
-                    <a:p>
-                      <a:pPr>
-                        <a:lnSpc>
-                          <a:spcPts val="1600"/>
-                        </a:lnSpc>
-                        <a:spcAft>
-                          <a:spcPts val="0"/>
-                        </a:spcAft>
-                        <a:defRPr sz="1200" b="1">
-                          <a:solidFill>
-                            <a:srgbClr val="FFFFFF"/>
-                          </a:solidFill>
-                          <a:latin typeface="Arial"/>
-                        </a:defRPr>
-                      </a:pPr>
-                      <a:r>
-                        <a:t>Field</a:t>
-                      </a:r>
-                    </a:p>
-                  </a:txBody>
-                  <a:tcPr marL="82296" marR="82296" marT="64008" marB="64008">
-                    <a:solidFill>
-                      <a:srgbClr val="16787C"/>
-                    </a:solidFill>
-                  </a:tcPr>
-                </a:tc>
-                <a:tc>
-                  <a:txBody>
-                    <a:bodyPr wrap="none"/>
-                    <a:lstStyle/>
-                    <a:p>
-                      <a:pPr>
-                        <a:lnSpc>
-                          <a:spcPts val="1600"/>
-                        </a:lnSpc>
-                        <a:spcAft>
-                          <a:spcPts val="0"/>
-                        </a:spcAft>
-                        <a:defRPr sz="1200" b="1">
-                          <a:solidFill>
-                            <a:srgbClr val="FFFFFF"/>
-                          </a:solidFill>
-                          <a:latin typeface="Arial"/>
-                        </a:defRPr>
-                      </a:pPr>
-                      <a:r>
-                        <a:t>Recorded detail</a:t>
-                      </a:r>
-                    </a:p>
-                  </a:txBody>
-                  <a:tcPr marL="82296" marR="82296" marT="64008" marB="64008">
-                    <a:solidFill>
-                      <a:srgbClr val="16787C"/>
-                    </a:solidFill>
-                  </a:tcPr>
-                </a:tc>
-              </a:tr>
-            </a:tbl>
-          </a:graphicData>
-        </a:graphic>
-      </p:graphicFrame>
-      <p:graphicFrame>
-        <p:nvGraphicFramePr>
-          <p:cNvPr id="7" name="Table 6"/>
-          <p:cNvGraphicFramePr>
-            <a:graphicFrameLocks noGrp="1"/>
-          </p:cNvGraphicFramePr>
-          <p:nvPr/>
-        </p:nvGraphicFramePr>
-        <p:xfrm>
-          <a:off x="365760" y="1700784"/>
-          <a:ext cx="8412479" cy="959103"/>
-        </p:xfrm>
-        <a:graphic>
-          <a:graphicData uri="http://schemas.openxmlformats.org/drawingml/2006/table">
-            <a:tbl>
-              <a:tblPr firstRow="1" bandRow="1">
-                <a:tableStyleId>{5C22544A-7EE6-4342-B048-85BDC9FD1C3A}</a:tableStyleId>
-              </a:tblPr>
-              <a:tblGrid>
-                <a:gridCol w="2271369"/>
-                <a:gridCol w="6141110"/>
-              </a:tblGrid>
-              <a:tr h="959103">
+              <a:tr h="755904">
                 <a:tc>
                   <a:txBody>
                     <a:bodyPr wrap="none"/>
@@ -12272,64 +11853,45 @@
                         </a:defRPr>
                       </a:pPr>
                       <a:r>
-                        <a:t>Presentation copy of saved report a7209748-4dcd-4092-898a-e2a5dc6c475f. The</a:t>
-                      </a:r>
-                    </a:p>
-                    <a:p>
-                      <a:pPr>
-                        <a:lnSpc>
-                          <a:spcPts val="1600"/>
-                        </a:lnSpc>
-                        <a:spcAft>
-                          <a:spcPts val="0"/>
-                        </a:spcAft>
-                        <a:defRPr sz="1200" b="0">
-                          <a:solidFill>
-                            <a:srgbClr val="21243A"/>
-                          </a:solidFill>
-                          <a:latin typeface="Arial"/>
-                        </a:defRPr>
-                      </a:pPr>
-                      <a:r>
-                        <a:t>descriptive filename replaces the earlier example ID for navigation. Original</a:t>
-                      </a:r>
-                    </a:p>
-                    <a:p>
-                      <a:pPr>
-                        <a:lnSpc>
-                          <a:spcPts val="1600"/>
-                        </a:lnSpc>
-                        <a:spcAft>
-                          <a:spcPts val="0"/>
-                        </a:spcAft>
-                        <a:defRPr sz="1200" b="0">
-                          <a:solidFill>
-                            <a:srgbClr val="21243A"/>
-                          </a:solidFill>
-                          <a:latin typeface="Arial"/>
-                        </a:defRPr>
-                      </a:pPr>
-                      <a:r>
-                        <a:t>analysis dates, provider replies, scores and acquisition context are retained; no</a:t>
-                      </a:r>
-                    </a:p>
-                    <a:p>
-                      <a:pPr>
-                        <a:lnSpc>
-                          <a:spcPts val="1600"/>
-                        </a:lnSpc>
-                        <a:spcAft>
-                          <a:spcPts val="0"/>
-                        </a:spcAft>
-                        <a:defRPr sz="1200" b="0">
-                          <a:solidFill>
-                            <a:srgbClr val="21243A"/>
-                          </a:solidFill>
-                          <a:latin typeface="Arial"/>
-                        </a:defRPr>
-                      </a:pPr>
-                      <a:r>
-                        <a:t>new model analysis.</a:t>
+                        <a:t>Provider latency values are restored from the acquisition receipts (maximum</a:t>
+                      </a:r>
+                    </a:p>
+                    <a:p>
+                      <a:pPr>
+                        <a:lnSpc>
+                          <a:spcPts val="1600"/>
+                        </a:lnSpc>
+                        <a:spcAft>
+                          <a:spcPts val="0"/>
+                        </a:spcAft>
+                        <a:defRPr sz="1200" b="0">
+                          <a:solidFill>
+                            <a:srgbClr val="21243A"/>
+                          </a:solidFill>
+                          <a:latin typeface="Arial"/>
+                        </a:defRPr>
+                      </a:pPr>
+                      <a:r>
+                        <a:t>sampled-frame latency per provider); raw replies and assessment results are</a:t>
+                      </a:r>
+                    </a:p>
+                    <a:p>
+                      <a:pPr>
+                        <a:lnSpc>
+                          <a:spcPts val="1600"/>
+                        </a:lnSpc>
+                        <a:spcAft>
+                          <a:spcPts val="0"/>
+                        </a:spcAft>
+                        <a:defRPr sz="1200" b="0">
+                          <a:solidFill>
+                            <a:srgbClr val="21243A"/>
+                          </a:solidFill>
+                          <a:latin typeface="Arial"/>
+                        </a:defRPr>
+                      </a:pPr>
+                      <a:r>
+                        <a:t>unchanged by this bookkeeping step.</a:t>
                       </a:r>
                     </a:p>
                   </a:txBody>
@@ -12955,7 +12517,7 @@
                         </a:defRPr>
                       </a:pPr>
                       <a:r>
-                        <a:t>5/100</a:t>
+                        <a:t>8/100</a:t>
                       </a:r>
                     </a:p>
                   </a:txBody>
@@ -14000,7 +13562,7 @@
                         </a:defRPr>
                       </a:pPr>
                       <a:r>
-                        <a:t>5/100</a:t>
+                        <a:t>8/100</a:t>
                       </a:r>
                     </a:p>
                   </a:txBody>
@@ -15277,7 +14839,7 @@
         </p:nvGraphicFramePr>
         <p:xfrm>
           <a:off x="365760" y="3797808"/>
-          <a:ext cx="8412479" cy="959103"/>
+          <a:ext cx="8412479" cy="1162304"/>
         </p:xfrm>
         <a:graphic>
           <a:graphicData uri="http://schemas.openxmlformats.org/drawingml/2006/table">
@@ -15289,7 +14851,7 @@
                 <a:gridCol w="2271369"/>
                 <a:gridCol w="6141110"/>
               </a:tblGrid>
-              <a:tr h="959103">
+              <a:tr h="1162304">
                 <a:tc>
                   <a:txBody>
                     <a:bodyPr wrap="none"/>
@@ -15340,64 +14902,83 @@
                         </a:defRPr>
                       </a:pPr>
                       <a:r>
-                        <a:t>synthetic likelihood 5/100; tells: consistent hand-drawn ink linework with natural</a:t>
-                      </a:r>
-                    </a:p>
-                    <a:p>
-                      <a:pPr>
-                        <a:lnSpc>
-                          <a:spcPts val="1600"/>
-                        </a:lnSpc>
-                        <a:spcAft>
-                          <a:spcPts val="0"/>
-                        </a:spcAft>
-                        <a:defRPr sz="1200" b="0">
-                          <a:solidFill>
-                            <a:srgbClr val="21243A"/>
-                          </a:solidFill>
-                          <a:latin typeface="Arial"/>
-                        </a:defRPr>
-                      </a:pPr>
-                      <a:r>
-                        <a:t>stroke weight variation, cross-hatched shading at left edge typical of</a:t>
-                      </a:r>
-                    </a:p>
-                    <a:p>
-                      <a:pPr>
-                        <a:lnSpc>
-                          <a:spcPts val="1600"/>
-                        </a:lnSpc>
-                        <a:spcAft>
-                          <a:spcPts val="0"/>
-                        </a:spcAft>
-                        <a:defRPr sz="1200" b="0">
-                          <a:solidFill>
-                            <a:srgbClr val="21243A"/>
-                          </a:solidFill>
-                          <a:latin typeface="Arial"/>
-                        </a:defRPr>
-                      </a:pPr>
-                      <a:r>
-                        <a:t>manual/digital-pen editorial cartooning, coherent, correctly spelled hand-lettered</a:t>
-                      </a:r>
-                    </a:p>
-                    <a:p>
-                      <a:pPr>
-                        <a:lnSpc>
-                          <a:spcPts val="1600"/>
-                        </a:lnSpc>
-                        <a:spcAft>
-                          <a:spcPts val="0"/>
-                        </a:spcAft>
-                        <a:defRPr sz="1200" b="0">
-                          <a:solidFill>
-                            <a:srgbClr val="21243A"/>
-                          </a:solidFill>
-                          <a:latin typeface="Arial"/>
-                        </a:defRPr>
-                      </a:pPr>
-                      <a:r>
-                        <a:t>text in speech bubble and labels, legible artist signature ('BEELER') with year mark</a:t>
+                        <a:t>synthetic likelihood 5/100; tells: hand-drawn ink linework with consistent,</a:t>
+                      </a:r>
+                    </a:p>
+                    <a:p>
+                      <a:pPr>
+                        <a:lnSpc>
+                          <a:spcPts val="1600"/>
+                        </a:lnSpc>
+                        <a:spcAft>
+                          <a:spcPts val="0"/>
+                        </a:spcAft>
+                        <a:defRPr sz="1200" b="0">
+                          <a:solidFill>
+                            <a:srgbClr val="21243A"/>
+                          </a:solidFill>
+                          <a:latin typeface="Arial"/>
+                        </a:defRPr>
+                      </a:pPr>
+                      <a:r>
+                        <a:t>deliberate pen strokes, coherent, correctly spelled hand-lettered text in speech</a:t>
+                      </a:r>
+                    </a:p>
+                    <a:p>
+                      <a:pPr>
+                        <a:lnSpc>
+                          <a:spcPts val="1600"/>
+                        </a:lnSpc>
+                        <a:spcAft>
+                          <a:spcPts val="0"/>
+                        </a:spcAft>
+                        <a:defRPr sz="1200" b="0">
+                          <a:solidFill>
+                            <a:srgbClr val="21243A"/>
+                          </a:solidFill>
+                          <a:latin typeface="Arial"/>
+                        </a:defRPr>
+                      </a:pPr>
+                      <a:r>
+                        <a:t>bubble and labels, legible artist signature and syndication credit (The Columbus</a:t>
+                      </a:r>
+                    </a:p>
+                    <a:p>
+                      <a:pPr>
+                        <a:lnSpc>
+                          <a:spcPts val="1600"/>
+                        </a:lnSpc>
+                        <a:spcAft>
+                          <a:spcPts val="0"/>
+                        </a:spcAft>
+                        <a:defRPr sz="1200" b="0">
+                          <a:solidFill>
+                            <a:srgbClr val="21243A"/>
+                          </a:solidFill>
+                          <a:latin typeface="Arial"/>
+                        </a:defRPr>
+                      </a:pPr>
+                      <a:r>
+                        <a:t>Dispatch / CagleCartoons.com, dated '19), cross-hatching texture on left</a:t>
+                      </a:r>
+                    </a:p>
+                    <a:p>
+                      <a:pPr>
+                        <a:lnSpc>
+                          <a:spcPts val="1600"/>
+                        </a:lnSpc>
+                        <a:spcAft>
+                          <a:spcPts val="0"/>
+                        </a:spcAft>
+                        <a:defRPr sz="1200" b="0">
+                          <a:solidFill>
+                            <a:srgbClr val="21243A"/>
+                          </a:solidFill>
+                          <a:latin typeface="Arial"/>
+                        </a:defRPr>
+                      </a:pPr>
+                      <a:r>
+                        <a:t>background typical of traditional/digital-inked editorial cartoons</a:t>
                       </a:r>
                     </a:p>
                   </a:txBody>
@@ -15421,7 +15002,7 @@
           <p:nvPr/>
         </p:nvGraphicFramePr>
         <p:xfrm>
-          <a:off x="365760" y="4756912"/>
+          <a:off x="365760" y="4960112"/>
           <a:ext cx="8412479" cy="349504"/>
         </p:xfrm>
         <a:graphic>
@@ -15485,7 +15066,7 @@
                         </a:defRPr>
                       </a:pPr>
                       <a:r>
-                        <a:t>Consistent hand-drawn ink linework with natural stroke weight variation</a:t>
+                        <a:t>Hand-drawn ink linework with consistent, deliberate pen strokes</a:t>
                       </a:r>
                     </a:p>
                   </a:txBody>
@@ -15509,8 +15090,8 @@
           <p:nvPr/>
         </p:nvGraphicFramePr>
         <p:xfrm>
-          <a:off x="365760" y="5106416"/>
-          <a:ext cx="8412479" cy="552704"/>
+          <a:off x="365760" y="5309616"/>
+          <a:ext cx="8412479" cy="349504"/>
         </p:xfrm>
         <a:graphic>
           <a:graphicData uri="http://schemas.openxmlformats.org/drawingml/2006/table">
@@ -15522,7 +15103,7 @@
                 <a:gridCol w="2271369"/>
                 <a:gridCol w="6141110"/>
               </a:tblGrid>
-              <a:tr h="552704">
+              <a:tr h="349504">
                 <a:tc>
                   <a:txBody>
                     <a:bodyPr wrap="none"/>
@@ -15573,26 +15154,7 @@
                         </a:defRPr>
                       </a:pPr>
                       <a:r>
-                        <a:t>Cross-hatched shading at left edge typical of manual/digital-pen editorial</a:t>
-                      </a:r>
-                    </a:p>
-                    <a:p>
-                      <a:pPr>
-                        <a:lnSpc>
-                          <a:spcPts val="1600"/>
-                        </a:lnSpc>
-                        <a:spcAft>
-                          <a:spcPts val="0"/>
-                        </a:spcAft>
-                        <a:defRPr sz="1200" b="0">
-                          <a:solidFill>
-                            <a:srgbClr val="21243A"/>
-                          </a:solidFill>
-                          <a:latin typeface="Arial"/>
-                        </a:defRPr>
-                      </a:pPr>
-                      <a:r>
-                        <a:t>cartooning</a:t>
+                        <a:t>Coherent, correctly spelled hand-lettered text in speech bubble and labels</a:t>
                       </a:r>
                     </a:p>
                   </a:txBody>
@@ -15891,7 +15453,7 @@
         </p:nvGraphicFramePr>
         <p:xfrm>
           <a:off x="365760" y="1700784"/>
-          <a:ext cx="8412479" cy="349504"/>
+          <a:ext cx="8412479" cy="552704"/>
         </p:xfrm>
         <a:graphic>
           <a:graphicData uri="http://schemas.openxmlformats.org/drawingml/2006/table">
@@ -15903,7 +15465,7 @@
                 <a:gridCol w="2271369"/>
                 <a:gridCol w="6141110"/>
               </a:tblGrid>
-              <a:tr h="349504">
+              <a:tr h="552704">
                 <a:tc>
                   <a:txBody>
                     <a:bodyPr wrap="none"/>
@@ -15954,7 +15516,26 @@
                         </a:defRPr>
                       </a:pPr>
                       <a:r>
-                        <a:t>Coherent, correctly spelled hand-lettered text in speech bubble and labels</a:t>
+                        <a:t>Legible artist signature and syndication credit (The Columbus Dispatch /</a:t>
+                      </a:r>
+                    </a:p>
+                    <a:p>
+                      <a:pPr>
+                        <a:lnSpc>
+                          <a:spcPts val="1600"/>
+                        </a:lnSpc>
+                        <a:spcAft>
+                          <a:spcPts val="0"/>
+                        </a:spcAft>
+                        <a:defRPr sz="1200" b="0">
+                          <a:solidFill>
+                            <a:srgbClr val="21243A"/>
+                          </a:solidFill>
+                          <a:latin typeface="Arial"/>
+                        </a:defRPr>
+                      </a:pPr>
+                      <a:r>
+                        <a:t>CagleCartoons.com, dated '19)</a:t>
                       </a:r>
                     </a:p>
                   </a:txBody>
@@ -15978,8 +15559,8 @@
           <p:nvPr/>
         </p:nvGraphicFramePr>
         <p:xfrm>
-          <a:off x="365760" y="2050288"/>
-          <a:ext cx="8412479" cy="349504"/>
+          <a:off x="365760" y="2253488"/>
+          <a:ext cx="8412479" cy="552704"/>
         </p:xfrm>
         <a:graphic>
           <a:graphicData uri="http://schemas.openxmlformats.org/drawingml/2006/table">
@@ -15991,7 +15572,7 @@
                 <a:gridCol w="2271369"/>
                 <a:gridCol w="6141110"/>
               </a:tblGrid>
-              <a:tr h="349504">
+              <a:tr h="552704">
                 <a:tc>
                   <a:txBody>
                     <a:bodyPr wrap="none"/>
@@ -16042,7 +15623,26 @@
                         </a:defRPr>
                       </a:pPr>
                       <a:r>
-                        <a:t>Legible artist signature ('BEELER') with year mark</a:t>
+                        <a:t>Cross-hatching texture on left background typical of traditional/digital-inked</a:t>
+                      </a:r>
+                    </a:p>
+                    <a:p>
+                      <a:pPr>
+                        <a:lnSpc>
+                          <a:spcPts val="1600"/>
+                        </a:lnSpc>
+                        <a:spcAft>
+                          <a:spcPts val="0"/>
+                        </a:spcAft>
+                        <a:defRPr sz="1200" b="0">
+                          <a:solidFill>
+                            <a:srgbClr val="21243A"/>
+                          </a:solidFill>
+                          <a:latin typeface="Arial"/>
+                        </a:defRPr>
+                      </a:pPr>
+                      <a:r>
+                        <a:t>editorial cartoons</a:t>
                       </a:r>
                     </a:p>
                   </a:txBody>
@@ -16066,8 +15666,8 @@
           <p:nvPr/>
         </p:nvGraphicFramePr>
         <p:xfrm>
-          <a:off x="365760" y="2399792"/>
-          <a:ext cx="8412479" cy="552704"/>
+          <a:off x="365760" y="2806192"/>
+          <a:ext cx="8412479" cy="349504"/>
         </p:xfrm>
         <a:graphic>
           <a:graphicData uri="http://schemas.openxmlformats.org/drawingml/2006/table">
@@ -16079,7 +15679,7 @@
                 <a:gridCol w="2271369"/>
                 <a:gridCol w="6141110"/>
               </a:tblGrid>
-              <a:tr h="552704">
+              <a:tr h="349504">
                 <a:tc>
                   <a:txBody>
                     <a:bodyPr wrap="none"/>
@@ -16130,26 +15730,7 @@
                         </a:defRPr>
                       </a:pPr>
                       <a:r>
-                        <a:t>Legible syndicate/publication credit ('The Columbus Dispatch',</a:t>
-                      </a:r>
-                    </a:p>
-                    <a:p>
-                      <a:pPr>
-                        <a:lnSpc>
-                          <a:spcPts val="1600"/>
-                        </a:lnSpc>
-                        <a:spcAft>
-                          <a:spcPts val="0"/>
-                        </a:spcAft>
-                        <a:defRPr sz="1200" b="0">
-                          <a:solidFill>
-                            <a:srgbClr val="21243A"/>
-                          </a:solidFill>
-                          <a:latin typeface="Arial"/>
-                        </a:defRPr>
-                      </a:pPr>
-                      <a:r>
-                        <a:t>'CagleCartoons.com')</a:t>
+                        <a:t>Anatomically coherent hands and consistent character styling</a:t>
                       </a:r>
                     </a:p>
                   </a:txBody>
@@ -16173,7 +15754,7 @@
           <p:nvPr/>
         </p:nvGraphicFramePr>
         <p:xfrm>
-          <a:off x="365760" y="2952496"/>
+          <a:off x="365760" y="3155696"/>
           <a:ext cx="8412479" cy="349504"/>
         </p:xfrm>
         <a:graphic>
@@ -16237,7 +15818,7 @@
                         </a:defRPr>
                       </a:pPr>
                       <a:r>
-                        <a:t>Anatomically coherent hands and consistent character styling</a:t>
+                        <a:t>Stylistic consistency with known editorial cartoonist conventions (Nate Beeler style)</a:t>
                       </a:r>
                     </a:p>
                   </a:txBody>
@@ -16261,7 +15842,7 @@
           <p:nvPr/>
         </p:nvGraphicFramePr>
         <p:xfrm>
-          <a:off x="365760" y="3301999"/>
+          <a:off x="365760" y="3505200"/>
           <a:ext cx="8412479" cy="349504"/>
         </p:xfrm>
         <a:graphic>
@@ -16325,7 +15906,7 @@
                         </a:defRPr>
                       </a:pPr>
                       <a:r>
-                        <a:t>Stylistic consistency with known Nate Beeler editorial cartoons</a:t>
+                        <a:t>Compression artifacts consistent with web re-encoding (webp)</a:t>
                       </a:r>
                     </a:p>
                   </a:txBody>
@@ -16349,95 +15930,7 @@
           <p:nvPr/>
         </p:nvGraphicFramePr>
         <p:xfrm>
-          <a:off x="365760" y="3651504"/>
-          <a:ext cx="8412479" cy="349504"/>
-        </p:xfrm>
-        <a:graphic>
-          <a:graphicData uri="http://schemas.openxmlformats.org/drawingml/2006/table">
-            <a:tbl>
-              <a:tblPr firstRow="1" bandRow="1">
-                <a:tableStyleId>{5C22544A-7EE6-4342-B048-85BDC9FD1C3A}</a:tableStyleId>
-              </a:tblPr>
-              <a:tblGrid>
-                <a:gridCol w="2271369"/>
-                <a:gridCol w="6141110"/>
-              </a:tblGrid>
-              <a:tr h="349504">
-                <a:tc>
-                  <a:txBody>
-                    <a:bodyPr wrap="none"/>
-                    <a:lstStyle/>
-                    <a:p>
-                      <a:pPr>
-                        <a:lnSpc>
-                          <a:spcPts val="1600"/>
-                        </a:lnSpc>
-                        <a:spcAft>
-                          <a:spcPts val="0"/>
-                        </a:spcAft>
-                        <a:defRPr sz="1200" b="0">
-                          <a:solidFill>
-                            <a:srgbClr val="21243A"/>
-                          </a:solidFill>
-                          <a:latin typeface="Arial"/>
-                        </a:defRPr>
-                      </a:pPr>
-                      <a:r>
-                        <a:t>Evidence 8</a:t>
-                      </a:r>
-                    </a:p>
-                  </a:txBody>
-                  <a:tcPr marL="82296" marR="82296" marT="64008" marB="64008">
-                    <a:solidFill>
-                      <a:srgbClr val="F1F7F7"/>
-                    </a:solidFill>
-                  </a:tcPr>
-                </a:tc>
-                <a:tc>
-                  <a:txBody>
-                    <a:bodyPr wrap="none"/>
-                    <a:lstStyle/>
-                    <a:p>
-                      <a:pPr>
-                        <a:lnSpc>
-                          <a:spcPts val="1600"/>
-                        </a:lnSpc>
-                        <a:spcAft>
-                          <a:spcPts val="0"/>
-                        </a:spcAft>
-                        <a:defRPr sz="1200" b="0">
-                          <a:solidFill>
-                            <a:srgbClr val="21243A"/>
-                          </a:solidFill>
-                          <a:latin typeface="Arial"/>
-                        </a:defRPr>
-                      </a:pPr>
-                      <a:r>
-                        <a:t>No AI texture smearing, garbled glyphs or melted details</a:t>
-                      </a:r>
-                    </a:p>
-                  </a:txBody>
-                  <a:tcPr marL="82296" marR="82296" marT="64008" marB="64008">
-                    <a:solidFill>
-                      <a:srgbClr val="F1F7F7"/>
-                    </a:solidFill>
-                  </a:tcPr>
-                </a:tc>
-              </a:tr>
-            </a:tbl>
-          </a:graphicData>
-        </a:graphic>
-      </p:graphicFrame>
-      <p:graphicFrame>
-        <p:nvGraphicFramePr>
-          <p:cNvPr id="13" name="Table 12"/>
-          <p:cNvGraphicFramePr>
-            <a:graphicFrameLocks noGrp="1"/>
-          </p:cNvGraphicFramePr>
-          <p:nvPr/>
-        </p:nvGraphicFramePr>
-        <p:xfrm>
-          <a:off x="365760" y="4001008"/>
+          <a:off x="365760" y="3854704"/>
           <a:ext cx="8412479" cy="959103"/>
         </p:xfrm>
         <a:graphic>
@@ -16471,100 +15964,100 @@
                         </a:defRPr>
                       </a:pPr>
                       <a:r>
-                        <a:t>Evidence 9</a:t>
-                      </a:r>
-                    </a:p>
-                  </a:txBody>
-                  <a:tcPr marL="82296" marR="82296" marT="64008" marB="64008">
-                    <a:solidFill>
-                      <a:srgbClr val="FFFFFF"/>
-                    </a:solidFill>
-                  </a:tcPr>
-                </a:tc>
-                <a:tc>
-                  <a:txBody>
-                    <a:bodyPr wrap="none"/>
-                    <a:lstStyle/>
-                    <a:p>
-                      <a:pPr>
-                        <a:lnSpc>
-                          <a:spcPts val="1600"/>
-                        </a:lnSpc>
-                        <a:spcAft>
-                          <a:spcPts val="0"/>
-                        </a:spcAft>
-                        <a:defRPr sz="1200" b="0">
-                          <a:solidFill>
-                            <a:srgbClr val="21243A"/>
-                          </a:solidFill>
-                          <a:latin typeface="Arial"/>
-                        </a:defRPr>
-                      </a:pPr>
-                      <a:r>
-                        <a:t>Caveat: Rating is based on visual style only. Illustrations give fewer forensic</a:t>
-                      </a:r>
-                    </a:p>
-                    <a:p>
-                      <a:pPr>
-                        <a:lnSpc>
-                          <a:spcPts val="1600"/>
-                        </a:lnSpc>
-                        <a:spcAft>
-                          <a:spcPts val="0"/>
-                        </a:spcAft>
-                        <a:defRPr sz="1200" b="0">
-                          <a:solidFill>
-                            <a:srgbClr val="21243A"/>
-                          </a:solidFill>
-                          <a:latin typeface="Arial"/>
-                        </a:defRPr>
-                      </a:pPr>
-                      <a:r>
-                        <a:t>signals than camera photos, and the image is a recompressed webp. Confirm</a:t>
-                      </a:r>
-                    </a:p>
-                    <a:p>
-                      <a:pPr>
-                        <a:lnSpc>
-                          <a:spcPts val="1600"/>
-                        </a:lnSpc>
-                        <a:spcAft>
-                          <a:spcPts val="0"/>
-                        </a:spcAft>
-                        <a:defRPr sz="1200" b="0">
-                          <a:solidFill>
-                            <a:srgbClr val="21243A"/>
-                          </a:solidFill>
-                          <a:latin typeface="Arial"/>
-                        </a:defRPr>
-                      </a:pPr>
-                      <a:r>
-                        <a:t>provenance against the original Cagle Cartoons or Columbus Dispatch publication</a:t>
-                      </a:r>
-                    </a:p>
-                    <a:p>
-                      <a:pPr>
-                        <a:lnSpc>
-                          <a:spcPts val="1600"/>
-                        </a:lnSpc>
-                        <a:spcAft>
-                          <a:spcPts val="0"/>
-                        </a:spcAft>
-                        <a:defRPr sz="1200" b="0">
-                          <a:solidFill>
-                            <a:srgbClr val="21243A"/>
-                          </a:solidFill>
-                          <a:latin typeface="Arial"/>
-                        </a:defRPr>
-                      </a:pPr>
-                      <a:r>
-                        <a:t>(circa 2019).</a:t>
-                      </a:r>
-                    </a:p>
-                  </a:txBody>
-                  <a:tcPr marL="82296" marR="82296" marT="64008" marB="64008">
-                    <a:solidFill>
-                      <a:srgbClr val="FFFFFF"/>
+                        <a:t>Evidence 8</a:t>
+                      </a:r>
+                    </a:p>
+                  </a:txBody>
+                  <a:tcPr marL="82296" marR="82296" marT="64008" marB="64008">
+                    <a:solidFill>
+                      <a:srgbClr val="F1F7F7"/>
+                    </a:solidFill>
+                  </a:tcPr>
+                </a:tc>
+                <a:tc>
+                  <a:txBody>
+                    <a:bodyPr wrap="none"/>
+                    <a:lstStyle/>
+                    <a:p>
+                      <a:pPr>
+                        <a:lnSpc>
+                          <a:spcPts val="1600"/>
+                        </a:lnSpc>
+                        <a:spcAft>
+                          <a:spcPts val="0"/>
+                        </a:spcAft>
+                        <a:defRPr sz="1200" b="0">
+                          <a:solidFill>
+                            <a:srgbClr val="21243A"/>
+                          </a:solidFill>
+                          <a:latin typeface="Arial"/>
+                        </a:defRPr>
+                      </a:pPr>
+                      <a:r>
+                        <a:t>Caveat: Image is a digital illustration, not a photo, so camera-based forensic</a:t>
+                      </a:r>
+                    </a:p>
+                    <a:p>
+                      <a:pPr>
+                        <a:lnSpc>
+                          <a:spcPts val="1600"/>
+                        </a:lnSpc>
+                        <a:spcAft>
+                          <a:spcPts val="0"/>
+                        </a:spcAft>
+                        <a:defRPr sz="1200" b="0">
+                          <a:solidFill>
+                            <a:srgbClr val="21243A"/>
+                          </a:solidFill>
+                          <a:latin typeface="Arial"/>
+                        </a:defRPr>
+                      </a:pPr>
+                      <a:r>
+                        <a:t>signals do not apply; origin assessment relies on stylistic and signature cues, and</a:t>
+                      </a:r>
+                    </a:p>
+                    <a:p>
+                      <a:pPr>
+                        <a:lnSpc>
+                          <a:spcPts val="1600"/>
+                        </a:lnSpc>
+                        <a:spcAft>
+                          <a:spcPts val="0"/>
+                        </a:spcAft>
+                        <a:defRPr sz="1200" b="0">
+                          <a:solidFill>
+                            <a:srgbClr val="21243A"/>
+                          </a:solidFill>
+                          <a:latin typeface="Arial"/>
+                        </a:defRPr>
+                      </a:pPr>
+                      <a:r>
+                        <a:t>a human should verify against the original syndicated publication (CagleCartoons,</a:t>
+                      </a:r>
+                    </a:p>
+                    <a:p>
+                      <a:pPr>
+                        <a:lnSpc>
+                          <a:spcPts val="1600"/>
+                        </a:lnSpc>
+                        <a:spcAft>
+                          <a:spcPts val="0"/>
+                        </a:spcAft>
+                        <a:defRPr sz="1200" b="0">
+                          <a:solidFill>
+                            <a:srgbClr val="21243A"/>
+                          </a:solidFill>
+                          <a:latin typeface="Arial"/>
+                        </a:defRPr>
+                      </a:pPr>
+                      <a:r>
+                        <a:t>2019) to rule out alterations.</a:t>
+                      </a:r>
+                    </a:p>
+                  </a:txBody>
+                  <a:tcPr marL="82296" marR="82296" marT="64008" marB="64008">
+                    <a:solidFill>
+                      <a:srgbClr val="F1F7F7"/>
                     </a:solidFill>
                   </a:tcPr>
                 </a:tc>
@@ -17448,64 +16941,64 @@
                         </a:defRPr>
                       </a:pPr>
                       <a:r>
-                        <a:t>synthetic likelihood 5/100; tells: Consistent pen-and-ink outlines and crosshatched</a:t>
-                      </a:r>
-                    </a:p>
-                    <a:p>
-                      <a:pPr>
-                        <a:lnSpc>
-                          <a:spcPts val="1600"/>
-                        </a:lnSpc>
-                        <a:spcAft>
-                          <a:spcPts val="0"/>
-                        </a:spcAft>
-                        <a:defRPr sz="1200" b="0">
-                          <a:solidFill>
-                            <a:srgbClr val="21243A"/>
-                          </a:solidFill>
-                          <a:latin typeface="Arial"/>
-                        </a:defRPr>
-                      </a:pPr>
-                      <a:r>
-                        <a:t>shading throughout the cartoon, Coherent, legible hand-lettered speech and</a:t>
-                      </a:r>
-                    </a:p>
-                    <a:p>
-                      <a:pPr>
-                        <a:lnSpc>
-                          <a:spcPts val="1600"/>
-                        </a:lnSpc>
-                        <a:spcAft>
-                          <a:spcPts val="0"/>
-                        </a:spcAft>
-                        <a:defRPr sz="1200" b="0">
-                          <a:solidFill>
-                            <a:srgbClr val="21243A"/>
-                          </a:solidFill>
-                          <a:latin typeface="Arial"/>
-                        </a:defRPr>
-                      </a:pPr>
-                      <a:r>
-                        <a:t>disease labels, Deliberate caricature proportions and integrated symbolic virus</a:t>
-                      </a:r>
-                    </a:p>
-                    <a:p>
-                      <a:pPr>
-                        <a:lnSpc>
-                          <a:spcPts val="1600"/>
-                        </a:lnSpc>
-                        <a:spcAft>
-                          <a:spcPts val="0"/>
-                        </a:spcAft>
-                        <a:defRPr sz="1200" b="0">
-                          <a:solidFill>
-                            <a:srgbClr val="21243A"/>
-                          </a:solidFill>
-                          <a:latin typeface="Arial"/>
-                        </a:defRPr>
-                      </a:pPr>
-                      <a:r>
-                        <a:t>heads, Visible publication credit and artist signature</a:t>
+                        <a:t>synthetic likelihood 8/100; tells: Consistent editorial-cartoon ink outlines and</a:t>
+                      </a:r>
+                    </a:p>
+                    <a:p>
+                      <a:pPr>
+                        <a:lnSpc>
+                          <a:spcPts val="1600"/>
+                        </a:lnSpc>
+                        <a:spcAft>
+                          <a:spcPts val="0"/>
+                        </a:spcAft>
+                        <a:defRPr sz="1200" b="0">
+                          <a:solidFill>
+                            <a:srgbClr val="21243A"/>
+                          </a:solidFill>
+                          <a:latin typeface="Arial"/>
+                        </a:defRPr>
+                      </a:pPr>
+                      <a:r>
+                        <a:t>crosshatching, Coherent hand-lettered speech and disease labels, Deliberate,</a:t>
+                      </a:r>
+                    </a:p>
+                    <a:p>
+                      <a:pPr>
+                        <a:lnSpc>
+                          <a:spcPts val="1600"/>
+                        </a:lnSpc>
+                        <a:spcAft>
+                          <a:spcPts val="0"/>
+                        </a:spcAft>
+                        <a:defRPr sz="1200" b="0">
+                          <a:solidFill>
+                            <a:srgbClr val="21243A"/>
+                          </a:solidFill>
+                          <a:latin typeface="Arial"/>
+                        </a:defRPr>
+                      </a:pPr>
+                      <a:r>
+                        <a:t>consistent caricature proportions, Integrated publication credit and artist</a:t>
+                      </a:r>
+                    </a:p>
+                    <a:p>
+                      <a:pPr>
+                        <a:lnSpc>
+                          <a:spcPts val="1600"/>
+                        </a:lnSpc>
+                        <a:spcAft>
+                          <a:spcPts val="0"/>
+                        </a:spcAft>
+                        <a:defRPr sz="1200" b="0">
+                          <a:solidFill>
+                            <a:srgbClr val="21243A"/>
+                          </a:solidFill>
+                          <a:latin typeface="Arial"/>
+                        </a:defRPr>
+                      </a:pPr>
+                      <a:r>
+                        <a:t>signature</a:t>
                       </a:r>
                     </a:p>
                   </a:txBody>
@@ -17593,7 +17086,7 @@
                         </a:defRPr>
                       </a:pPr>
                       <a:r>
-                        <a:t>Consistent pen-and-ink outlines and crosshatched shading throughout the cartoon</a:t>
+                        <a:t>Consistent editorial-cartoon ink outlines and crosshatching</a:t>
                       </a:r>
                     </a:p>
                   </a:txBody>
@@ -17681,7 +17174,7 @@
                         </a:defRPr>
                       </a:pPr>
                       <a:r>
-                        <a:t>Coherent, legible hand-lettered speech and disease labels</a:t>
+                        <a:t>Coherent hand-lettered speech and disease labels</a:t>
                       </a:r>
                     </a:p>
                   </a:txBody>
@@ -17769,7 +17262,7 @@
                         </a:defRPr>
                       </a:pPr>
                       <a:r>
-                        <a:t>Deliberate caricature proportions and integrated symbolic virus heads</a:t>
+                        <a:t>Deliberate, consistent caricature proportions</a:t>
                       </a:r>
                     </a:p>
                   </a:txBody>
@@ -18131,7 +17624,7 @@
                         </a:defRPr>
                       </a:pPr>
                       <a:r>
-                        <a:t>Visible publication credit and artist signature</a:t>
+                        <a:t>Integrated publication credit and artist signature</a:t>
                       </a:r>
                     </a:p>
                   </a:txBody>
@@ -18156,7 +17649,7 @@
         </p:nvGraphicFramePr>
         <p:xfrm>
           <a:off x="365760" y="2050288"/>
-          <a:ext cx="8412479" cy="755904"/>
+          <a:ext cx="8412479" cy="349504"/>
         </p:xfrm>
         <a:graphic>
           <a:graphicData uri="http://schemas.openxmlformats.org/drawingml/2006/table">
@@ -18168,7 +17661,7 @@
                 <a:gridCol w="2271369"/>
                 <a:gridCol w="6141110"/>
               </a:tblGrid>
-              <a:tr h="755904">
+              <a:tr h="349504">
                 <a:tc>
                   <a:txBody>
                     <a:bodyPr wrap="none"/>
@@ -18219,51 +17712,120 @@
                         </a:defRPr>
                       </a:pPr>
                       <a:r>
-                        <a:t>Caveat: Appears to be a conventional editorial illustration, not a camera photo;</a:t>
-                      </a:r>
-                    </a:p>
-                    <a:p>
-                      <a:pPr>
-                        <a:lnSpc>
-                          <a:spcPts val="1600"/>
-                        </a:lnSpc>
-                        <a:spcAft>
-                          <a:spcPts val="0"/>
-                        </a:spcAft>
-                        <a:defRPr sz="1200" b="0">
-                          <a:solidFill>
-                            <a:srgbClr val="21243A"/>
-                          </a:solidFill>
-                          <a:latin typeface="Arial"/>
-                        </a:defRPr>
-                      </a:pPr>
-                      <a:r>
-                        <a:t>visual inspection alone cannot verify authorship or exclude AI edits, and the</a:t>
-                      </a:r>
-                    </a:p>
-                    <a:p>
-                      <a:pPr>
-                        <a:lnSpc>
-                          <a:spcPts val="1600"/>
-                        </a:lnSpc>
-                        <a:spcAft>
-                          <a:spcPts val="0"/>
-                        </a:spcAft>
-                        <a:defRPr sz="1200" b="0">
-                          <a:solidFill>
-                            <a:srgbClr val="21243A"/>
-                          </a:solidFill>
-                          <a:latin typeface="Arial"/>
-                        </a:defRPr>
-                      </a:pPr>
-                      <a:r>
-                        <a:t>stylized signature/date are difficult to read.</a:t>
+                        <a:t>No conspicuous generative texture or lettering artifacts</a:t>
                       </a:r>
                     </a:p>
                   </a:txBody>
                   <a:tcPr marL="82296" marR="82296" marT="64008" marB="64008">
                     <a:solidFill>
                       <a:srgbClr val="FFFFFF"/>
+                    </a:solidFill>
+                  </a:tcPr>
+                </a:tc>
+              </a:tr>
+            </a:tbl>
+          </a:graphicData>
+        </a:graphic>
+      </p:graphicFrame>
+      <p:graphicFrame>
+        <p:nvGraphicFramePr>
+          <p:cNvPr id="9" name="Table 8"/>
+          <p:cNvGraphicFramePr>
+            <a:graphicFrameLocks noGrp="1"/>
+          </p:cNvGraphicFramePr>
+          <p:nvPr/>
+        </p:nvGraphicFramePr>
+        <p:xfrm>
+          <a:off x="365760" y="2399792"/>
+          <a:ext cx="8412479" cy="552704"/>
+        </p:xfrm>
+        <a:graphic>
+          <a:graphicData uri="http://schemas.openxmlformats.org/drawingml/2006/table">
+            <a:tbl>
+              <a:tblPr firstRow="1" bandRow="1">
+                <a:tableStyleId>{5C22544A-7EE6-4342-B048-85BDC9FD1C3A}</a:tableStyleId>
+              </a:tblPr>
+              <a:tblGrid>
+                <a:gridCol w="2271369"/>
+                <a:gridCol w="6141110"/>
+              </a:tblGrid>
+              <a:tr h="552704">
+                <a:tc>
+                  <a:txBody>
+                    <a:bodyPr wrap="none"/>
+                    <a:lstStyle/>
+                    <a:p>
+                      <a:pPr>
+                        <a:lnSpc>
+                          <a:spcPts val="1600"/>
+                        </a:lnSpc>
+                        <a:spcAft>
+                          <a:spcPts val="0"/>
+                        </a:spcAft>
+                        <a:defRPr sz="1200" b="0">
+                          <a:solidFill>
+                            <a:srgbClr val="21243A"/>
+                          </a:solidFill>
+                          <a:latin typeface="Arial"/>
+                        </a:defRPr>
+                      </a:pPr>
+                      <a:r>
+                        <a:t>Evidence 6</a:t>
+                      </a:r>
+                    </a:p>
+                  </a:txBody>
+                  <a:tcPr marL="82296" marR="82296" marT="64008" marB="64008">
+                    <a:solidFill>
+                      <a:srgbClr val="F1F7F7"/>
+                    </a:solidFill>
+                  </a:tcPr>
+                </a:tc>
+                <a:tc>
+                  <a:txBody>
+                    <a:bodyPr wrap="none"/>
+                    <a:lstStyle/>
+                    <a:p>
+                      <a:pPr>
+                        <a:lnSpc>
+                          <a:spcPts val="1600"/>
+                        </a:lnSpc>
+                        <a:spcAft>
+                          <a:spcPts val="0"/>
+                        </a:spcAft>
+                        <a:defRPr sz="1200" b="0">
+                          <a:solidFill>
+                            <a:srgbClr val="21243A"/>
+                          </a:solidFill>
+                          <a:latin typeface="Arial"/>
+                        </a:defRPr>
+                      </a:pPr>
+                      <a:r>
+                        <a:t>Caveat: This is an illustration, not a camera photograph; style and signature alone</a:t>
+                      </a:r>
+                    </a:p>
+                    <a:p>
+                      <a:pPr>
+                        <a:lnSpc>
+                          <a:spcPts val="1600"/>
+                        </a:lnSpc>
+                        <a:spcAft>
+                          <a:spcPts val="0"/>
+                        </a:spcAft>
+                        <a:defRPr sz="1200" b="0">
+                          <a:solidFill>
+                            <a:srgbClr val="21243A"/>
+                          </a:solidFill>
+                          <a:latin typeface="Arial"/>
+                        </a:defRPr>
+                      </a:pPr>
+                      <a:r>
+                        <a:t>cannot establish human authorship or exclude AI editing.</a:t>
+                      </a:r>
+                    </a:p>
+                  </a:txBody>
+                  <a:tcPr marL="82296" marR="82296" marT="64008" marB="64008">
+                    <a:solidFill>
+                      <a:srgbClr val="F1F7F7"/>
                     </a:solidFill>
                   </a:tcPr>
                 </a:tc>
@@ -19147,45 +18709,45 @@
                         </a:defRPr>
                       </a:pPr>
                       <a:r>
-                        <a:t>synthetic likelihood 25/100; tells: consistent editorial cartoon linework, artist</a:t>
-                      </a:r>
-                    </a:p>
-                    <a:p>
-                      <a:pPr>
-                        <a:lnSpc>
-                          <a:spcPts val="1600"/>
-                        </a:lnSpc>
-                        <a:spcAft>
-                          <a:spcPts val="0"/>
-                        </a:spcAft>
-                        <a:defRPr sz="1200" b="0">
-                          <a:solidFill>
-                            <a:srgbClr val="21243A"/>
-                          </a:solidFill>
-                          <a:latin typeface="Arial"/>
-                        </a:defRPr>
-                      </a:pPr>
-                      <a:r>
-                        <a:t>signature and syndication text, hand-drawn hatching and crosshatching, coherent</a:t>
-                      </a:r>
-                    </a:p>
-                    <a:p>
-                      <a:pPr>
-                        <a:lnSpc>
-                          <a:spcPts val="1600"/>
-                        </a:lnSpc>
-                        <a:spcAft>
-                          <a:spcPts val="0"/>
-                        </a:spcAft>
-                        <a:defRPr sz="1200" b="0">
-                          <a:solidFill>
-                            <a:srgbClr val="21243A"/>
-                          </a:solidFill>
-                          <a:latin typeface="Arial"/>
-                        </a:defRPr>
-                      </a:pPr>
-                      <a:r>
-                        <a:t>hand lettering</a:t>
+                        <a:t>synthetic likelihood 25/100; tells: consistent hand-drawn editorial cartoon style,</a:t>
+                      </a:r>
+                    </a:p>
+                    <a:p>
+                      <a:pPr>
+                        <a:lnSpc>
+                          <a:spcPts val="1600"/>
+                        </a:lnSpc>
+                        <a:spcAft>
+                          <a:spcPts val="0"/>
+                        </a:spcAft>
+                        <a:defRPr sz="1200" b="0">
+                          <a:solidFill>
+                            <a:srgbClr val="21243A"/>
+                          </a:solidFill>
+                          <a:latin typeface="Arial"/>
+                        </a:defRPr>
+                      </a:pPr>
+                      <a:r>
+                        <a:t>legible artist signature and syndicate attribution, coherent crosshatching and ink</a:t>
+                      </a:r>
+                    </a:p>
+                    <a:p>
+                      <a:pPr>
+                        <a:lnSpc>
+                          <a:spcPts val="1600"/>
+                        </a:lnSpc>
+                        <a:spcAft>
+                          <a:spcPts val="0"/>
+                        </a:spcAft>
+                        <a:defRPr sz="1200" b="0">
+                          <a:solidFill>
+                            <a:srgbClr val="21243A"/>
+                          </a:solidFill>
+                          <a:latin typeface="Arial"/>
+                        </a:defRPr>
+                      </a:pPr>
+                      <a:r>
+                        <a:t>work, absence of diffusion generation artifacts</a:t>
                       </a:r>
                     </a:p>
                   </a:txBody>
@@ -19273,7 +18835,7 @@
                         </a:defRPr>
                       </a:pPr>
                       <a:r>
-                        <a:t>Consistent editorial cartoon linework</a:t>
+                        <a:t>Consistent hand-drawn editorial cartoon style</a:t>
                       </a:r>
                     </a:p>
                   </a:txBody>
@@ -19361,7 +18923,7 @@
                         </a:defRPr>
                       </a:pPr>
                       <a:r>
-                        <a:t>Artist signature and syndication text</a:t>
+                        <a:t>Legible artist signature and syndicate attribution</a:t>
                       </a:r>
                     </a:p>
                   </a:txBody>
@@ -19449,7 +19011,7 @@
                         </a:defRPr>
                       </a:pPr>
                       <a:r>
-                        <a:t>Hand-drawn hatching and crosshatching</a:t>
+                        <a:t>Coherent crosshatching and ink work</a:t>
                       </a:r>
                     </a:p>
                   </a:txBody>
@@ -19811,7 +19373,7 @@
                         </a:defRPr>
                       </a:pPr>
                       <a:r>
-                        <a:t>Coherent hand lettering</a:t>
+                        <a:t>Absence of diffusion generation artifacts</a:t>
                       </a:r>
                     </a:p>
                   </a:txBody>
@@ -19899,26 +19461,26 @@
                         </a:defRPr>
                       </a:pPr>
                       <a:r>
-                        <a:t>Caveat: Editorial illustrations follow stylistic conventions distinct from</a:t>
-                      </a:r>
-                    </a:p>
-                    <a:p>
-                      <a:pPr>
-                        <a:lnSpc>
-                          <a:spcPts val="1600"/>
-                        </a:lnSpc>
-                        <a:spcAft>
-                          <a:spcPts val="0"/>
-                        </a:spcAft>
-                        <a:defRPr sz="1200" b="0">
-                          <a:solidFill>
-                            <a:srgbClr val="21243A"/>
-                          </a:solidFill>
-                          <a:latin typeface="Arial"/>
-                        </a:defRPr>
-                      </a:pPr>
-                      <a:r>
-                        <a:t>photographic media, which automated detectors may mischaracterize.</a:t>
+                        <a:t>Caveat: Editorial illustrations are non-photographic, requiring human review to</a:t>
+                      </a:r>
+                    </a:p>
+                    <a:p>
+                      <a:pPr>
+                        <a:lnSpc>
+                          <a:spcPts val="1600"/>
+                        </a:lnSpc>
+                        <a:spcAft>
+                          <a:spcPts val="0"/>
+                        </a:spcAft>
+                        <a:defRPr sz="1200" b="0">
+                          <a:solidFill>
+                            <a:srgbClr val="21243A"/>
+                          </a:solidFill>
+                          <a:latin typeface="Arial"/>
+                        </a:defRPr>
+                      </a:pPr>
+                      <a:r>
+                        <a:t>confirm original publication provenance.</a:t>
                       </a:r>
                     </a:p>
                   </a:txBody>
